--- a/docs/sidekick-90-day-decision-deck.pptx
+++ b/docs/sidekick-90-day-decision-deck.pptx
@@ -27156,7 +27156,7 @@
                           <a:ea typeface="Calibri" pitchFamily="34" charset="-122"/>
                           <a:cs typeface="Calibri" pitchFamily="34" charset="-120"/>
                         </a:rPr>
-                        <a:t>Worth</a:t>
+                        <a:t>Value</a:t>
                       </a:r>
                       <a:endParaRPr lang="en-US" sz="1100" dirty="0">
                         <a:latin typeface="Calibri" charset="0"/>
@@ -27224,7 +27224,7 @@
                           <a:ea typeface="Calibri" pitchFamily="34" charset="-122"/>
                           <a:cs typeface="Calibri" pitchFamily="34" charset="-120"/>
                         </a:rPr>
-                        <a:t>~$15M a year per point of 90-day retention</a:t>
+                        <a:t>$15M a year for every 1 point gained in 90-day retention</a:t>
                       </a:r>
                       <a:endParaRPr lang="en-US" sz="1100" dirty="0">
                         <a:latin typeface="Calibri" charset="0"/>
@@ -27289,7 +27289,7 @@
                           <a:ea typeface="Calibri" pitchFamily="34" charset="-122"/>
                           <a:cs typeface="Calibri" pitchFamily="34" charset="-120"/>
                         </a:rPr>
-                        <a:t>~$100M a year per minute returned per shift</a:t>
+                        <a:t>$100M a year for every 1 minute given back per shift</a:t>
                       </a:r>
                       <a:endParaRPr lang="en-US" sz="1100" dirty="0">
                         <a:latin typeface="Calibri" charset="0"/>
@@ -27354,7 +27354,7 @@
                           <a:ea typeface="Calibri" pitchFamily="34" charset="-122"/>
                           <a:cs typeface="Calibri" pitchFamily="34" charset="-120"/>
                         </a:rPr>
-                        <a:t>~2x retention yield on the same incentive dollar</a:t>
+                        <a:t>About 2x the retention gain from the same incentive budget</a:t>
                       </a:r>
                       <a:endParaRPr lang="en-US" sz="1100" dirty="0">
                         <a:latin typeface="Calibri" charset="0"/>
@@ -27421,7 +27421,7 @@
                           <a:ea typeface="Calibri" pitchFamily="34" charset="-122"/>
                           <a:cs typeface="Calibri" pitchFamily="34" charset="-120"/>
                         </a:rPr>
-                        <a:t>North star</a:t>
+                        <a:t>Key Metric Improved</a:t>
                       </a:r>
                       <a:endParaRPr lang="en-US" sz="1100" dirty="0">
                         <a:latin typeface="Calibri" charset="0"/>
@@ -27489,7 +27489,7 @@
                           <a:ea typeface="Calibri" pitchFamily="34" charset="-122"/>
                           <a:cs typeface="Calibri" pitchFamily="34" charset="-120"/>
                         </a:rPr>
-                        <a:t>90-day new-hire retention, pilot vs control stores</a:t>
+                        <a:t>90-day new-hire retention, pilot stores vs control stores</a:t>
                       </a:r>
                       <a:endParaRPr lang="en-US" sz="1100" dirty="0">
                         <a:latin typeface="Calibri" charset="0"/>
@@ -27554,7 +27554,7 @@
                           <a:ea typeface="Calibri" pitchFamily="34" charset="-122"/>
                           <a:cs typeface="Calibri" pitchFamily="34" charset="-120"/>
                         </a:rPr>
-                        <a:t>Minutes of associate time returned per week</a:t>
+                        <a:t>Minutes of work time returned per associate per week</a:t>
                       </a:r>
                       <a:endParaRPr lang="en-US" sz="1100" dirty="0">
                         <a:latin typeface="Calibri" charset="0"/>
@@ -27619,7 +27619,7 @@
                           <a:ea typeface="Calibri" pitchFamily="34" charset="-122"/>
                           <a:cs typeface="Calibri" pitchFamily="34" charset="-120"/>
                         </a:rPr>
-                        <a:t>Predicted vs actual lift in bandit cohorts, with holdouts</a:t>
+                        <a:t>Predicted vs actual retention lift, measured against holdouts</a:t>
                       </a:r>
                       <a:endParaRPr lang="en-US" sz="1100" dirty="0">
                         <a:latin typeface="Calibri" charset="0"/>
@@ -27754,7 +27754,7 @@
                           <a:ea typeface="Calibri" pitchFamily="34" charset="-122"/>
                           <a:cs typeface="Calibri" pitchFamily="34" charset="-120"/>
                         </a:rPr>
-                        <a:t>Exits cluster early and themes read confusion and isolation, not wage</a:t>
+                        <a:t>New hires quit early, and exit interviews blame confusion and isolation, not pay</a:t>
                       </a:r>
                       <a:endParaRPr lang="en-US" sz="1100" dirty="0">
                         <a:latin typeface="Calibri" charset="0"/>
@@ -27819,7 +27819,7 @@
                           <a:ea typeface="Calibri" pitchFamily="34" charset="-122"/>
                           <a:cs typeface="Calibri" pitchFamily="34" charset="-120"/>
                         </a:rPr>
-                        <a:t>High question volume dead-ends into manual handoffs</a:t>
+                        <a:t>Associates ask the same questions constantly, and answers dead-end in a manual handoff</a:t>
                       </a:r>
                       <a:endParaRPr lang="en-US" sz="1100" dirty="0">
                         <a:latin typeface="Calibri" charset="0"/>
@@ -27884,7 +27884,7 @@
                           <a:ea typeface="Calibri" pitchFamily="34" charset="-122"/>
                           <a:cs typeface="Calibri" pitchFamily="34" charset="-120"/>
                         </a:rPr>
-                        <a:t>Attrition drivers vary sharply by cohort and there is appetite for platform spend</a:t>
+                        <a:t>Different groups quit for different reasons, and there is budget for a platform</a:t>
                       </a:r>
                       <a:endParaRPr lang="en-US" sz="1100" dirty="0">
                         <a:latin typeface="Calibri" charset="0"/>
@@ -27951,7 +27951,7 @@
                           <a:ea typeface="Calibri" pitchFamily="34" charset="-122"/>
                           <a:cs typeface="Calibri" pitchFamily="34" charset="-120"/>
                         </a:rPr>
-                        <a:t>Main risk</a:t>
+                        <a:t>Risk</a:t>
                       </a:r>
                       <a:endParaRPr lang="en-US" sz="1100" dirty="0">
                         <a:latin typeface="Calibri" charset="0"/>
@@ -28019,7 +28019,7 @@
                           <a:ea typeface="Calibri" pitchFamily="34" charset="-122"/>
                           <a:cs typeface="Calibri" pitchFamily="34" charset="-120"/>
                         </a:rPr>
-                        <a:t>Retention is multi-causal. The app moves only its share</a:t>
+                        <a:t>People quit for many reasons. An app only moves the ones it touches</a:t>
                       </a:r>
                       <a:endParaRPr lang="en-US" sz="1100" dirty="0">
                         <a:latin typeface="Calibri" charset="0"/>
@@ -28084,7 +28084,7 @@
                           <a:ea typeface="Calibri" pitchFamily="34" charset="-122"/>
                           <a:cs typeface="Calibri" pitchFamily="34" charset="-120"/>
                         </a:rPr>
-                        <a:t>Actions touch systems of record. One wrong write costs more trust than 100 right answers earn</a:t>
+                        <a:t>Agents write into scheduling and HR systems. One bad write undoes 100 right answers</a:t>
                       </a:r>
                       <a:endParaRPr lang="en-US" sz="1100" dirty="0">
                         <a:latin typeface="Calibri" charset="0"/>
@@ -28149,7 +28149,7 @@
                           <a:ea typeface="Calibri" pitchFamily="34" charset="-122"/>
                           <a:cs typeface="Calibri" pitchFamily="34" charset="-120"/>
                         </a:rPr>
-                        <a:t>Scoring can read as surveillance. Slowest path to a visible win</a:t>
+                        <a:t>Scoring associates can feel like surveillance. Slowest bet to show a visible win</a:t>
                       </a:r>
                       <a:endParaRPr lang="en-US" sz="1100" dirty="0">
                         <a:latin typeface="Calibri" charset="0"/>

--- a/docs/sidekick-90-day-decision-deck.pptx
+++ b/docs/sidekick-90-day-decision-deck.pptx
@@ -25774,20 +25774,506 @@
           </a:p>
         </p:txBody>
       </p:sp>
-      <p:sp>
-        <p:nvSpPr>
-          <p:cNvPr id="5" name="Shape 3"/>
-          <p:cNvSpPr/>
-          <p:nvPr/>
-        </p:nvSpPr>
-        <p:spPr>
-          <a:xfrm>
-            <a:off x="566928" y="1975104"/>
-            <a:ext cx="3502152" cy="1371600"/>
+      <p:pic>
+        <p:nvPicPr>
+          <p:cNvPr id="5" name="Image 0" descr="/home/user/walmart-sidekick-pm-framework/docs/doc-assets/wm-2ppl-car-up-fetching.jpeg">    </p:cNvPr>
+          <p:cNvPicPr>
+            <a:picLocks noChangeAspect="1"/>
+          </p:cNvPicPr>
+          <p:nvPr/>
+        </p:nvPicPr>
+        <p:blipFill>
+          <a:blip r:embed="rId1"/>
+          <a:stretch>
+            <a:fillRect/>
+          </a:stretch>
+        </p:blipFill>
+        <p:spPr>
+          <a:xfrm>
+            <a:off x="566928" y="1938528"/>
+            <a:ext cx="3940469" cy="2212848"/>
+          </a:xfrm>
+          <a:prstGeom prst="rect">
+            <a:avLst/>
+          </a:prstGeom>
+        </p:spPr>
+      </p:pic>
+      <p:pic>
+        <p:nvPicPr>
+          <p:cNvPr id="6" name="Image 1" descr="/home/user/walmart-sidekick-pm-framework/docs/doc-assets/wm-promotion.jpeg">    </p:cNvPr>
+          <p:cNvPicPr>
+            <a:picLocks noChangeAspect="1"/>
+          </p:cNvPicPr>
+          <p:nvPr/>
+        </p:nvPicPr>
+        <p:blipFill>
+          <a:blip r:embed="rId2"/>
+          <a:stretch>
+            <a:fillRect/>
+          </a:stretch>
+        </p:blipFill>
+        <p:spPr>
+          <a:xfrm>
+            <a:off x="4671989" y="1938528"/>
+            <a:ext cx="2212848" cy="2212848"/>
+          </a:xfrm>
+          <a:prstGeom prst="rect">
+            <a:avLst/>
+          </a:prstGeom>
+        </p:spPr>
+      </p:pic>
+      <p:sp>
+        <p:nvSpPr>
+          <p:cNvPr id="7" name="Text 3"/>
+          <p:cNvSpPr/>
+          <p:nvPr/>
+        </p:nvSpPr>
+        <p:spPr>
+          <a:xfrm>
+            <a:off x="566928" y="4206240"/>
+            <a:ext cx="3940469" cy="256032"/>
+          </a:xfrm>
+          <a:prstGeom prst="rect">
+            <a:avLst/>
+          </a:prstGeom>
+          <a:noFill/>
+          <a:ln/>
+        </p:spPr>
+        <p:txBody>
+          <a:bodyPr wrap="square" lIns="0" tIns="0" rIns="0" bIns="0" rtlCol="0" anchor="ctr"/>
+          <a:lstStyle/>
+          <a:p>
+            <a:pPr indent="0" marL="0">
+              <a:buNone/>
+            </a:pPr>
+            <a:r>
+              <a:rPr lang="en-US" sz="1100" i="1" dirty="0">
+                <a:solidFill>
+                  <a:srgbClr val="5E6980"/>
+                </a:solidFill>
+                <a:latin typeface="Calibri" pitchFamily="34" charset="0"/>
+                <a:ea typeface="Calibri" pitchFamily="34" charset="-122"/>
+                <a:cs typeface="Calibri" pitchFamily="34" charset="-120"/>
+              </a:rPr>
+              <a:t>Most of the job, most of the time.</a:t>
+            </a:r>
+            <a:endParaRPr lang="en-US" sz="1100" dirty="0"/>
+          </a:p>
+        </p:txBody>
+      </p:sp>
+      <p:sp>
+        <p:nvSpPr>
+          <p:cNvPr id="8" name="Text 4"/>
+          <p:cNvSpPr/>
+          <p:nvPr/>
+        </p:nvSpPr>
+        <p:spPr>
+          <a:xfrm>
+            <a:off x="4671989" y="4206240"/>
+            <a:ext cx="2212848" cy="256032"/>
+          </a:xfrm>
+          <a:prstGeom prst="rect">
+            <a:avLst/>
+          </a:prstGeom>
+          <a:noFill/>
+          <a:ln/>
+        </p:spPr>
+        <p:txBody>
+          <a:bodyPr wrap="square" lIns="0" tIns="0" rIns="0" bIns="0" rtlCol="0" anchor="ctr"/>
+          <a:lstStyle/>
+          <a:p>
+            <a:pPr indent="0" marL="0">
+              <a:buNone/>
+            </a:pPr>
+            <a:r>
+              <a:rPr lang="en-US" sz="1100" i="1" dirty="0">
+                <a:solidFill>
+                  <a:srgbClr val="5E6980"/>
+                </a:solidFill>
+                <a:latin typeface="Calibri" pitchFamily="34" charset="0"/>
+                <a:ea typeface="Calibri" pitchFamily="34" charset="-122"/>
+                <a:cs typeface="Calibri" pitchFamily="34" charset="-120"/>
+              </a:rPr>
+              <a:t>Some days look like this.</a:t>
+            </a:r>
+            <a:endParaRPr lang="en-US" sz="1100" dirty="0"/>
+          </a:p>
+        </p:txBody>
+      </p:sp>
+      <p:sp>
+        <p:nvSpPr>
+          <p:cNvPr id="9" name="Text 5"/>
+          <p:cNvSpPr/>
+          <p:nvPr/>
+        </p:nvSpPr>
+        <p:spPr>
+          <a:xfrm>
+            <a:off x="7250597" y="1938528"/>
+            <a:ext cx="4371427" cy="457200"/>
+          </a:xfrm>
+          <a:prstGeom prst="rect">
+            <a:avLst/>
+          </a:prstGeom>
+          <a:noFill/>
+          <a:ln/>
+        </p:spPr>
+        <p:txBody>
+          <a:bodyPr wrap="square" lIns="0" tIns="0" rIns="0" bIns="0" rtlCol="0" anchor="t"/>
+          <a:lstStyle/>
+          <a:p>
+            <a:pPr indent="0" marL="0">
+              <a:lnSpc>
+                <a:spcPts val="1700"/>
+              </a:lnSpc>
+              <a:buNone/>
+            </a:pPr>
+            <a:r>
+              <a:rPr lang="en-US" sz="1300" b="1" dirty="0">
+                <a:solidFill>
+                  <a:srgbClr val="16233B"/>
+                </a:solidFill>
+                <a:latin typeface="Calibri" pitchFamily="34" charset="0"/>
+                <a:ea typeface="Calibri" pitchFamily="34" charset="-122"/>
+                <a:cs typeface="Calibri" pitchFamily="34" charset="-120"/>
+              </a:rPr>
+              <a:t>Same store, same shift, different reasons for being there:</a:t>
+            </a:r>
+            <a:endParaRPr lang="en-US" sz="1300" dirty="0"/>
+          </a:p>
+        </p:txBody>
+      </p:sp>
+      <p:sp>
+        <p:nvSpPr>
+          <p:cNvPr id="10" name="Shape 6"/>
+          <p:cNvSpPr/>
+          <p:nvPr/>
+        </p:nvSpPr>
+        <p:spPr>
+          <a:xfrm>
+            <a:off x="7250597" y="2532888"/>
+            <a:ext cx="41148" cy="530352"/>
+          </a:xfrm>
+          <a:prstGeom prst="rect">
+            <a:avLst/>
+          </a:prstGeom>
+          <a:solidFill>
+            <a:srgbClr val="1E4E6B"/>
+          </a:solidFill>
+          <a:ln w="12700">
+            <a:solidFill>
+              <a:srgbClr val="333333"/>
+            </a:solidFill>
+            <a:prstDash val="solid"/>
+          </a:ln>
+        </p:spPr>
+      </p:sp>
+      <p:sp>
+        <p:nvSpPr>
+          <p:cNvPr id="11" name="Text 7"/>
+          <p:cNvSpPr/>
+          <p:nvPr/>
+        </p:nvSpPr>
+        <p:spPr>
+          <a:xfrm>
+            <a:off x="7415189" y="2505456"/>
+            <a:ext cx="4206835" cy="201168"/>
+          </a:xfrm>
+          <a:prstGeom prst="rect">
+            <a:avLst/>
+          </a:prstGeom>
+          <a:noFill/>
+          <a:ln/>
+        </p:spPr>
+        <p:txBody>
+          <a:bodyPr wrap="square" lIns="0" tIns="0" rIns="0" bIns="0" rtlCol="0" anchor="ctr"/>
+          <a:lstStyle/>
+          <a:p>
+            <a:pPr indent="0" marL="0">
+              <a:buNone/>
+            </a:pPr>
+            <a:r>
+              <a:rPr lang="en-US" sz="1000" b="1" spc="120" kern="0" dirty="0">
+                <a:solidFill>
+                  <a:srgbClr val="1E4E6B"/>
+                </a:solidFill>
+                <a:latin typeface="Calibri" pitchFamily="34" charset="0"/>
+                <a:ea typeface="Calibri" pitchFamily="34" charset="-122"/>
+                <a:cs typeface="Calibri" pitchFamily="34" charset="-120"/>
+              </a:rPr>
+              <a:t>SECURITY</a:t>
+            </a:r>
+            <a:endParaRPr lang="en-US" sz="1000" dirty="0"/>
+          </a:p>
+        </p:txBody>
+      </p:sp>
+      <p:sp>
+        <p:nvSpPr>
+          <p:cNvPr id="12" name="Text 8"/>
+          <p:cNvSpPr/>
+          <p:nvPr/>
+        </p:nvSpPr>
+        <p:spPr>
+          <a:xfrm>
+            <a:off x="7415189" y="2724912"/>
+            <a:ext cx="4206835" cy="347472"/>
+          </a:xfrm>
+          <a:prstGeom prst="rect">
+            <a:avLst/>
+          </a:prstGeom>
+          <a:noFill/>
+          <a:ln/>
+        </p:spPr>
+        <p:txBody>
+          <a:bodyPr wrap="square" lIns="0" tIns="0" rIns="0" bIns="0" rtlCol="0" anchor="t"/>
+          <a:lstStyle/>
+          <a:p>
+            <a:pPr indent="0" marL="0">
+              <a:lnSpc>
+                <a:spcPts val="1500"/>
+              </a:lnSpc>
+              <a:buNone/>
+            </a:pPr>
+            <a:r>
+              <a:rPr lang="en-US" sz="1200" dirty="0">
+                <a:solidFill>
+                  <a:srgbClr val="1B2338"/>
+                </a:solidFill>
+                <a:latin typeface="Calibri" pitchFamily="34" charset="0"/>
+                <a:ea typeface="Calibri" pitchFamily="34" charset="-122"/>
+                <a:cs typeface="Calibri" pitchFamily="34" charset="-120"/>
+              </a:rPr>
+              <a:t>Rent is due this month. Cash is the only signal that lands.</a:t>
+            </a:r>
+            <a:endParaRPr lang="en-US" sz="1200" dirty="0"/>
+          </a:p>
+        </p:txBody>
+      </p:sp>
+      <p:sp>
+        <p:nvSpPr>
+          <p:cNvPr id="13" name="Shape 9"/>
+          <p:cNvSpPr/>
+          <p:nvPr/>
+        </p:nvSpPr>
+        <p:spPr>
+          <a:xfrm>
+            <a:off x="7250597" y="3136392"/>
+            <a:ext cx="41148" cy="530352"/>
+          </a:xfrm>
+          <a:prstGeom prst="rect">
+            <a:avLst/>
+          </a:prstGeom>
+          <a:solidFill>
+            <a:srgbClr val="35604A"/>
+          </a:solidFill>
+          <a:ln w="12700">
+            <a:solidFill>
+              <a:srgbClr val="333333"/>
+            </a:solidFill>
+            <a:prstDash val="solid"/>
+          </a:ln>
+        </p:spPr>
+      </p:sp>
+      <p:sp>
+        <p:nvSpPr>
+          <p:cNvPr id="14" name="Text 10"/>
+          <p:cNvSpPr/>
+          <p:nvPr/>
+        </p:nvSpPr>
+        <p:spPr>
+          <a:xfrm>
+            <a:off x="7415189" y="3108960"/>
+            <a:ext cx="4206835" cy="201168"/>
+          </a:xfrm>
+          <a:prstGeom prst="rect">
+            <a:avLst/>
+          </a:prstGeom>
+          <a:noFill/>
+          <a:ln/>
+        </p:spPr>
+        <p:txBody>
+          <a:bodyPr wrap="square" lIns="0" tIns="0" rIns="0" bIns="0" rtlCol="0" anchor="ctr"/>
+          <a:lstStyle/>
+          <a:p>
+            <a:pPr indent="0" marL="0">
+              <a:buNone/>
+            </a:pPr>
+            <a:r>
+              <a:rPr lang="en-US" sz="1000" b="1" spc="120" kern="0" dirty="0">
+                <a:solidFill>
+                  <a:srgbClr val="35604A"/>
+                </a:solidFill>
+                <a:latin typeface="Calibri" pitchFamily="34" charset="0"/>
+                <a:ea typeface="Calibri" pitchFamily="34" charset="-122"/>
+                <a:cs typeface="Calibri" pitchFamily="34" charset="-120"/>
+              </a:rPr>
+              <a:t>RECOGNITION</a:t>
+            </a:r>
+            <a:endParaRPr lang="en-US" sz="1000" dirty="0"/>
+          </a:p>
+        </p:txBody>
+      </p:sp>
+      <p:sp>
+        <p:nvSpPr>
+          <p:cNvPr id="15" name="Text 11"/>
+          <p:cNvSpPr/>
+          <p:nvPr/>
+        </p:nvSpPr>
+        <p:spPr>
+          <a:xfrm>
+            <a:off x="7415189" y="3328416"/>
+            <a:ext cx="4206835" cy="347472"/>
+          </a:xfrm>
+          <a:prstGeom prst="rect">
+            <a:avLst/>
+          </a:prstGeom>
+          <a:noFill/>
+          <a:ln/>
+        </p:spPr>
+        <p:txBody>
+          <a:bodyPr wrap="square" lIns="0" tIns="0" rIns="0" bIns="0" rtlCol="0" anchor="t"/>
+          <a:lstStyle/>
+          <a:p>
+            <a:pPr indent="0" marL="0">
+              <a:lnSpc>
+                <a:spcPts val="1500"/>
+              </a:lnSpc>
+              <a:buNone/>
+            </a:pPr>
+            <a:r>
+              <a:rPr lang="en-US" sz="1200" dirty="0">
+                <a:solidFill>
+                  <a:srgbClr val="1B2338"/>
+                </a:solidFill>
+                <a:latin typeface="Calibri" pitchFamily="34" charset="0"/>
+                <a:ea typeface="Calibri" pitchFamily="34" charset="-122"/>
+                <a:cs typeface="Calibri" pitchFamily="34" charset="-120"/>
+              </a:rPr>
+              <a:t>Wants to be good at this, and wants someone to notice.</a:t>
+            </a:r>
+            <a:endParaRPr lang="en-US" sz="1200" dirty="0"/>
+          </a:p>
+        </p:txBody>
+      </p:sp>
+      <p:sp>
+        <p:nvSpPr>
+          <p:cNvPr id="16" name="Shape 12"/>
+          <p:cNvSpPr/>
+          <p:nvPr/>
+        </p:nvSpPr>
+        <p:spPr>
+          <a:xfrm>
+            <a:off x="7250597" y="3739896"/>
+            <a:ext cx="41148" cy="530352"/>
+          </a:xfrm>
+          <a:prstGeom prst="rect">
+            <a:avLst/>
+          </a:prstGeom>
+          <a:solidFill>
+            <a:srgbClr val="8A5A11"/>
+          </a:solidFill>
+          <a:ln w="12700">
+            <a:solidFill>
+              <a:srgbClr val="333333"/>
+            </a:solidFill>
+            <a:prstDash val="solid"/>
+          </a:ln>
+        </p:spPr>
+      </p:sp>
+      <p:sp>
+        <p:nvSpPr>
+          <p:cNvPr id="17" name="Text 13"/>
+          <p:cNvSpPr/>
+          <p:nvPr/>
+        </p:nvSpPr>
+        <p:spPr>
+          <a:xfrm>
+            <a:off x="7415189" y="3712464"/>
+            <a:ext cx="4206835" cy="201168"/>
+          </a:xfrm>
+          <a:prstGeom prst="rect">
+            <a:avLst/>
+          </a:prstGeom>
+          <a:noFill/>
+          <a:ln/>
+        </p:spPr>
+        <p:txBody>
+          <a:bodyPr wrap="square" lIns="0" tIns="0" rIns="0" bIns="0" rtlCol="0" anchor="ctr"/>
+          <a:lstStyle/>
+          <a:p>
+            <a:pPr indent="0" marL="0">
+              <a:buNone/>
+            </a:pPr>
+            <a:r>
+              <a:rPr lang="en-US" sz="1000" b="1" spc="120" kern="0" dirty="0">
+                <a:solidFill>
+                  <a:srgbClr val="8A5A11"/>
+                </a:solidFill>
+                <a:latin typeface="Calibri" pitchFamily="34" charset="0"/>
+                <a:ea typeface="Calibri" pitchFamily="34" charset="-122"/>
+                <a:cs typeface="Calibri" pitchFamily="34" charset="-120"/>
+              </a:rPr>
+              <a:t>TIME BACK</a:t>
+            </a:r>
+            <a:endParaRPr lang="en-US" sz="1000" dirty="0"/>
+          </a:p>
+        </p:txBody>
+      </p:sp>
+      <p:sp>
+        <p:nvSpPr>
+          <p:cNvPr id="18" name="Text 14"/>
+          <p:cNvSpPr/>
+          <p:nvPr/>
+        </p:nvSpPr>
+        <p:spPr>
+          <a:xfrm>
+            <a:off x="7415189" y="3931920"/>
+            <a:ext cx="4206835" cy="347472"/>
+          </a:xfrm>
+          <a:prstGeom prst="rect">
+            <a:avLst/>
+          </a:prstGeom>
+          <a:noFill/>
+          <a:ln/>
+        </p:spPr>
+        <p:txBody>
+          <a:bodyPr wrap="square" lIns="0" tIns="0" rIns="0" bIns="0" rtlCol="0" anchor="t"/>
+          <a:lstStyle/>
+          <a:p>
+            <a:pPr indent="0" marL="0">
+              <a:lnSpc>
+                <a:spcPts val="1500"/>
+              </a:lnSpc>
+              <a:buNone/>
+            </a:pPr>
+            <a:r>
+              <a:rPr lang="en-US" sz="1200" dirty="0">
+                <a:solidFill>
+                  <a:srgbClr val="1B2338"/>
+                </a:solidFill>
+                <a:latin typeface="Calibri" pitchFamily="34" charset="0"/>
+                <a:ea typeface="Calibri" pitchFamily="34" charset="-122"/>
+                <a:cs typeface="Calibri" pitchFamily="34" charset="-120"/>
+              </a:rPr>
+              <a:t>Wants the day to stop being a slog. An hour off beats a gift card.</a:t>
+            </a:r>
+            <a:endParaRPr lang="en-US" sz="1200" dirty="0"/>
+          </a:p>
+        </p:txBody>
+      </p:sp>
+      <p:sp>
+        <p:nvSpPr>
+          <p:cNvPr id="19" name="Shape 15"/>
+          <p:cNvSpPr/>
+          <p:nvPr/>
+        </p:nvSpPr>
+        <p:spPr>
+          <a:xfrm>
+            <a:off x="566928" y="4590288"/>
+            <a:ext cx="11055096" cy="1298448"/>
           </a:xfrm>
           <a:prstGeom prst="roundRect">
             <a:avLst>
-              <a:gd name="adj" fmla="val 8000"/>
+              <a:gd name="adj" fmla="val 8451"/>
             </a:avLst>
           </a:prstGeom>
           <a:solidFill>
@@ -25803,413 +26289,14 @@
       </p:sp>
       <p:sp>
         <p:nvSpPr>
-          <p:cNvPr id="6" name="Shape 4"/>
-          <p:cNvSpPr/>
-          <p:nvPr/>
-        </p:nvSpPr>
-        <p:spPr>
-          <a:xfrm>
-            <a:off x="566928" y="1975104"/>
-            <a:ext cx="3502152" cy="50292"/>
-          </a:xfrm>
-          <a:prstGeom prst="rect">
-            <a:avLst/>
-          </a:prstGeom>
-          <a:solidFill>
-            <a:srgbClr val="1E4E6B"/>
-          </a:solidFill>
-          <a:ln w="12700">
-            <a:solidFill>
-              <a:srgbClr val="333333"/>
-            </a:solidFill>
-            <a:prstDash val="solid"/>
-          </a:ln>
-        </p:spPr>
-      </p:sp>
-      <p:sp>
-        <p:nvSpPr>
-          <p:cNvPr id="7" name="Text 5"/>
-          <p:cNvSpPr/>
-          <p:nvPr/>
-        </p:nvSpPr>
-        <p:spPr>
-          <a:xfrm>
-            <a:off x="768096" y="2139696"/>
-            <a:ext cx="3099816" cy="274320"/>
-          </a:xfrm>
-          <a:prstGeom prst="rect">
-            <a:avLst/>
-          </a:prstGeom>
-          <a:noFill/>
-          <a:ln/>
-        </p:spPr>
-        <p:txBody>
-          <a:bodyPr wrap="square" lIns="0" tIns="0" rIns="0" bIns="0" rtlCol="0" anchor="ctr"/>
-          <a:lstStyle/>
-          <a:p>
-            <a:pPr indent="0" marL="0">
-              <a:buNone/>
-            </a:pPr>
-            <a:r>
-              <a:rPr lang="en-US" sz="1050" b="1" spc="120" kern="0" dirty="0">
-                <a:solidFill>
-                  <a:srgbClr val="1E4E6B"/>
-                </a:solidFill>
-                <a:latin typeface="Calibri" pitchFamily="34" charset="0"/>
-                <a:ea typeface="Calibri" pitchFamily="34" charset="-122"/>
-                <a:cs typeface="Calibri" pitchFamily="34" charset="-120"/>
-              </a:rPr>
-              <a:t>SECURITY</a:t>
-            </a:r>
-            <a:endParaRPr lang="en-US" sz="1050" dirty="0"/>
-          </a:p>
-        </p:txBody>
-      </p:sp>
-      <p:sp>
-        <p:nvSpPr>
-          <p:cNvPr id="8" name="Text 6"/>
-          <p:cNvSpPr/>
-          <p:nvPr/>
-        </p:nvSpPr>
-        <p:spPr>
-          <a:xfrm>
-            <a:off x="768096" y="2450592"/>
-            <a:ext cx="3099816" cy="804672"/>
-          </a:xfrm>
-          <a:prstGeom prst="rect">
-            <a:avLst/>
-          </a:prstGeom>
-          <a:noFill/>
-          <a:ln/>
-        </p:spPr>
-        <p:txBody>
-          <a:bodyPr wrap="square" lIns="0" tIns="0" rIns="0" bIns="0" rtlCol="0" anchor="t"/>
-          <a:lstStyle/>
-          <a:p>
-            <a:pPr indent="0" marL="0">
-              <a:lnSpc>
-                <a:spcPts val="1700"/>
-              </a:lnSpc>
-              <a:buNone/>
-            </a:pPr>
-            <a:r>
-              <a:rPr lang="en-US" sz="1300" dirty="0">
-                <a:solidFill>
-                  <a:srgbClr val="1B2338"/>
-                </a:solidFill>
-                <a:latin typeface="Calibri" pitchFamily="34" charset="0"/>
-                <a:ea typeface="Calibri" pitchFamily="34" charset="-122"/>
-                <a:cs typeface="Calibri" pitchFamily="34" charset="-120"/>
-              </a:rPr>
-              <a:t>Paying rent this month. Cash is the only signal that lands.</a:t>
-            </a:r>
-            <a:endParaRPr lang="en-US" sz="1300" dirty="0"/>
-          </a:p>
-        </p:txBody>
-      </p:sp>
-      <p:sp>
-        <p:nvSpPr>
-          <p:cNvPr id="9" name="Shape 7"/>
-          <p:cNvSpPr/>
-          <p:nvPr/>
-        </p:nvSpPr>
-        <p:spPr>
-          <a:xfrm>
-            <a:off x="4343400" y="1975104"/>
-            <a:ext cx="3502152" cy="1371600"/>
-          </a:xfrm>
-          <a:prstGeom prst="roundRect">
-            <a:avLst>
-              <a:gd name="adj" fmla="val 8000"/>
-            </a:avLst>
-          </a:prstGeom>
-          <a:solidFill>
-            <a:srgbClr val="F1F5FA"/>
-          </a:solidFill>
-          <a:ln w="12700">
-            <a:solidFill>
-              <a:srgbClr val="F1F5FA"/>
-            </a:solidFill>
-            <a:prstDash val="solid"/>
-          </a:ln>
-        </p:spPr>
-      </p:sp>
-      <p:sp>
-        <p:nvSpPr>
-          <p:cNvPr id="10" name="Shape 8"/>
-          <p:cNvSpPr/>
-          <p:nvPr/>
-        </p:nvSpPr>
-        <p:spPr>
-          <a:xfrm>
-            <a:off x="4343400" y="1975104"/>
-            <a:ext cx="3502152" cy="50292"/>
-          </a:xfrm>
-          <a:prstGeom prst="rect">
-            <a:avLst/>
-          </a:prstGeom>
-          <a:solidFill>
-            <a:srgbClr val="35604A"/>
-          </a:solidFill>
-          <a:ln w="12700">
-            <a:solidFill>
-              <a:srgbClr val="333333"/>
-            </a:solidFill>
-            <a:prstDash val="solid"/>
-          </a:ln>
-        </p:spPr>
-      </p:sp>
-      <p:sp>
-        <p:nvSpPr>
-          <p:cNvPr id="11" name="Text 9"/>
-          <p:cNvSpPr/>
-          <p:nvPr/>
-        </p:nvSpPr>
-        <p:spPr>
-          <a:xfrm>
-            <a:off x="4544568" y="2139696"/>
-            <a:ext cx="3099816" cy="274320"/>
-          </a:xfrm>
-          <a:prstGeom prst="rect">
-            <a:avLst/>
-          </a:prstGeom>
-          <a:noFill/>
-          <a:ln/>
-        </p:spPr>
-        <p:txBody>
-          <a:bodyPr wrap="square" lIns="0" tIns="0" rIns="0" bIns="0" rtlCol="0" anchor="ctr"/>
-          <a:lstStyle/>
-          <a:p>
-            <a:pPr indent="0" marL="0">
-              <a:buNone/>
-            </a:pPr>
-            <a:r>
-              <a:rPr lang="en-US" sz="1050" b="1" spc="120" kern="0" dirty="0">
-                <a:solidFill>
-                  <a:srgbClr val="35604A"/>
-                </a:solidFill>
-                <a:latin typeface="Calibri" pitchFamily="34" charset="0"/>
-                <a:ea typeface="Calibri" pitchFamily="34" charset="-122"/>
-                <a:cs typeface="Calibri" pitchFamily="34" charset="-120"/>
-              </a:rPr>
-              <a:t>RECOGNITION</a:t>
-            </a:r>
-            <a:endParaRPr lang="en-US" sz="1050" dirty="0"/>
-          </a:p>
-        </p:txBody>
-      </p:sp>
-      <p:sp>
-        <p:nvSpPr>
-          <p:cNvPr id="12" name="Text 10"/>
-          <p:cNvSpPr/>
-          <p:nvPr/>
-        </p:nvSpPr>
-        <p:spPr>
-          <a:xfrm>
-            <a:off x="4544568" y="2450592"/>
-            <a:ext cx="3099816" cy="804672"/>
-          </a:xfrm>
-          <a:prstGeom prst="rect">
-            <a:avLst/>
-          </a:prstGeom>
-          <a:noFill/>
-          <a:ln/>
-        </p:spPr>
-        <p:txBody>
-          <a:bodyPr wrap="square" lIns="0" tIns="0" rIns="0" bIns="0" rtlCol="0" anchor="t"/>
-          <a:lstStyle/>
-          <a:p>
-            <a:pPr indent="0" marL="0">
-              <a:lnSpc>
-                <a:spcPts val="1700"/>
-              </a:lnSpc>
-              <a:buNone/>
-            </a:pPr>
-            <a:r>
-              <a:rPr lang="en-US" sz="1300" dirty="0">
-                <a:solidFill>
-                  <a:srgbClr val="1B2338"/>
-                </a:solidFill>
-                <a:latin typeface="Calibri" pitchFamily="34" charset="0"/>
-                <a:ea typeface="Calibri" pitchFamily="34" charset="-122"/>
-                <a:cs typeface="Calibri" pitchFamily="34" charset="-120"/>
-              </a:rPr>
-              <a:t>Wants to be good at this, and wants someone to notice they are.</a:t>
-            </a:r>
-            <a:endParaRPr lang="en-US" sz="1300" dirty="0"/>
-          </a:p>
-        </p:txBody>
-      </p:sp>
-      <p:sp>
-        <p:nvSpPr>
-          <p:cNvPr id="13" name="Shape 11"/>
-          <p:cNvSpPr/>
-          <p:nvPr/>
-        </p:nvSpPr>
-        <p:spPr>
-          <a:xfrm>
-            <a:off x="8119872" y="1975104"/>
-            <a:ext cx="3502152" cy="1371600"/>
-          </a:xfrm>
-          <a:prstGeom prst="roundRect">
-            <a:avLst>
-              <a:gd name="adj" fmla="val 8000"/>
-            </a:avLst>
-          </a:prstGeom>
-          <a:solidFill>
-            <a:srgbClr val="F1F5FA"/>
-          </a:solidFill>
-          <a:ln w="12700">
-            <a:solidFill>
-              <a:srgbClr val="F1F5FA"/>
-            </a:solidFill>
-            <a:prstDash val="solid"/>
-          </a:ln>
-        </p:spPr>
-      </p:sp>
-      <p:sp>
-        <p:nvSpPr>
-          <p:cNvPr id="14" name="Shape 12"/>
-          <p:cNvSpPr/>
-          <p:nvPr/>
-        </p:nvSpPr>
-        <p:spPr>
-          <a:xfrm>
-            <a:off x="8119872" y="1975104"/>
-            <a:ext cx="3502152" cy="50292"/>
-          </a:xfrm>
-          <a:prstGeom prst="rect">
-            <a:avLst/>
-          </a:prstGeom>
-          <a:solidFill>
-            <a:srgbClr val="8A5A11"/>
-          </a:solidFill>
-          <a:ln w="12700">
-            <a:solidFill>
-              <a:srgbClr val="333333"/>
-            </a:solidFill>
-            <a:prstDash val="solid"/>
-          </a:ln>
-        </p:spPr>
-      </p:sp>
-      <p:sp>
-        <p:nvSpPr>
-          <p:cNvPr id="15" name="Text 13"/>
-          <p:cNvSpPr/>
-          <p:nvPr/>
-        </p:nvSpPr>
-        <p:spPr>
-          <a:xfrm>
-            <a:off x="8321040" y="2139696"/>
-            <a:ext cx="3099816" cy="274320"/>
-          </a:xfrm>
-          <a:prstGeom prst="rect">
-            <a:avLst/>
-          </a:prstGeom>
-          <a:noFill/>
-          <a:ln/>
-        </p:spPr>
-        <p:txBody>
-          <a:bodyPr wrap="square" lIns="0" tIns="0" rIns="0" bIns="0" rtlCol="0" anchor="ctr"/>
-          <a:lstStyle/>
-          <a:p>
-            <a:pPr indent="0" marL="0">
-              <a:buNone/>
-            </a:pPr>
-            <a:r>
-              <a:rPr lang="en-US" sz="1050" b="1" spc="120" kern="0" dirty="0">
-                <a:solidFill>
-                  <a:srgbClr val="8A5A11"/>
-                </a:solidFill>
-                <a:latin typeface="Calibri" pitchFamily="34" charset="0"/>
-                <a:ea typeface="Calibri" pitchFamily="34" charset="-122"/>
-                <a:cs typeface="Calibri" pitchFamily="34" charset="-120"/>
-              </a:rPr>
-              <a:t>TIME BACK</a:t>
-            </a:r>
-            <a:endParaRPr lang="en-US" sz="1050" dirty="0"/>
-          </a:p>
-        </p:txBody>
-      </p:sp>
-      <p:sp>
-        <p:nvSpPr>
-          <p:cNvPr id="16" name="Text 14"/>
-          <p:cNvSpPr/>
-          <p:nvPr/>
-        </p:nvSpPr>
-        <p:spPr>
-          <a:xfrm>
-            <a:off x="8321040" y="2450592"/>
-            <a:ext cx="3099816" cy="804672"/>
-          </a:xfrm>
-          <a:prstGeom prst="rect">
-            <a:avLst/>
-          </a:prstGeom>
-          <a:noFill/>
-          <a:ln/>
-        </p:spPr>
-        <p:txBody>
-          <a:bodyPr wrap="square" lIns="0" tIns="0" rIns="0" bIns="0" rtlCol="0" anchor="t"/>
-          <a:lstStyle/>
-          <a:p>
-            <a:pPr indent="0" marL="0">
-              <a:lnSpc>
-                <a:spcPts val="1700"/>
-              </a:lnSpc>
-              <a:buNone/>
-            </a:pPr>
-            <a:r>
-              <a:rPr lang="en-US" sz="1300" dirty="0">
-                <a:solidFill>
-                  <a:srgbClr val="1B2338"/>
-                </a:solidFill>
-                <a:latin typeface="Calibri" pitchFamily="34" charset="0"/>
-                <a:ea typeface="Calibri" pitchFamily="34" charset="-122"/>
-                <a:cs typeface="Calibri" pitchFamily="34" charset="-120"/>
-              </a:rPr>
-              <a:t>Wants the day to stop being a slog. An hour off beats a gift card.</a:t>
-            </a:r>
-            <a:endParaRPr lang="en-US" sz="1300" dirty="0"/>
-          </a:p>
-        </p:txBody>
-      </p:sp>
-      <p:sp>
-        <p:nvSpPr>
-          <p:cNvPr id="17" name="Shape 15"/>
-          <p:cNvSpPr/>
-          <p:nvPr/>
-        </p:nvSpPr>
-        <p:spPr>
-          <a:xfrm>
-            <a:off x="566928" y="3621024"/>
-            <a:ext cx="11055096" cy="1572768"/>
-          </a:xfrm>
-          <a:prstGeom prst="roundRect">
-            <a:avLst>
-              <a:gd name="adj" fmla="val 6977"/>
-            </a:avLst>
-          </a:prstGeom>
-          <a:solidFill>
-            <a:srgbClr val="F1F5FA"/>
-          </a:solidFill>
-          <a:ln w="12700">
-            <a:solidFill>
-              <a:srgbClr val="F1F5FA"/>
-            </a:solidFill>
-            <a:prstDash val="solid"/>
-          </a:ln>
-        </p:spPr>
-      </p:sp>
-      <p:sp>
-        <p:nvSpPr>
-          <p:cNvPr id="18" name="Shape 16"/>
-          <p:cNvSpPr/>
-          <p:nvPr/>
-        </p:nvSpPr>
-        <p:spPr>
-          <a:xfrm>
-            <a:off x="566928" y="3621024"/>
-            <a:ext cx="50292" cy="1572768"/>
+          <p:cNvPr id="20" name="Shape 16"/>
+          <p:cNvSpPr/>
+          <p:nvPr/>
+        </p:nvSpPr>
+        <p:spPr>
+          <a:xfrm>
+            <a:off x="566928" y="4590288"/>
+            <a:ext cx="50292" cy="1298448"/>
           </a:xfrm>
           <a:prstGeom prst="rect">
             <a:avLst/>
@@ -26227,14 +26314,14 @@
       </p:sp>
       <p:sp>
         <p:nvSpPr>
-          <p:cNvPr id="19" name="Text 17"/>
-          <p:cNvSpPr/>
-          <p:nvPr/>
-        </p:nvSpPr>
-        <p:spPr>
-          <a:xfrm>
-            <a:off x="877824" y="3767328"/>
-            <a:ext cx="10433304" cy="1298448"/>
+          <p:cNvPr id="21" name="Text 17"/>
+          <p:cNvSpPr/>
+          <p:nvPr/>
+        </p:nvSpPr>
+        <p:spPr>
+          <a:xfrm>
+            <a:off x="877824" y="4700016"/>
+            <a:ext cx="10433304" cy="1097280"/>
           </a:xfrm>
           <a:prstGeom prst="rect">
             <a:avLst/>
@@ -26248,12 +26335,12 @@
           <a:p>
             <a:pPr indent="0" marL="0">
               <a:lnSpc>
-                <a:spcPts val="2100"/>
+                <a:spcPts val="2000"/>
               </a:lnSpc>
               <a:buNone/>
             </a:pPr>
             <a:r>
-              <a:rPr lang="en-US" sz="1400" dirty="0">
+              <a:rPr lang="en-US" sz="1350" dirty="0">
                 <a:solidFill>
                   <a:srgbClr val="1B2338"/>
                 </a:solidFill>
@@ -26263,20 +26350,20 @@
               </a:rPr>
               <a:t>I worked two summers at Meijer. It was boring, and I got good at wasting time. Nobody was measuring whether I was engaged, so I wasn't. My store was in a safe area. Plenty of associates do not get that. The difference between a job that empties you and one that gives something back is mostly whether the place notices you are in it.</a:t>
             </a:r>
-            <a:endParaRPr lang="en-US" sz="1400" dirty="0"/>
-          </a:p>
-        </p:txBody>
-      </p:sp>
-      <p:sp>
-        <p:nvSpPr>
-          <p:cNvPr id="20" name="Text 18"/>
-          <p:cNvSpPr/>
-          <p:nvPr/>
-        </p:nvSpPr>
-        <p:spPr>
-          <a:xfrm>
-            <a:off x="566928" y="5431536"/>
-            <a:ext cx="11055096" cy="502920"/>
+            <a:endParaRPr lang="en-US" sz="1350" dirty="0"/>
+          </a:p>
+        </p:txBody>
+      </p:sp>
+      <p:sp>
+        <p:nvSpPr>
+          <p:cNvPr id="22" name="Text 18"/>
+          <p:cNvSpPr/>
+          <p:nvPr/>
+        </p:nvSpPr>
+        <p:spPr>
+          <a:xfrm>
+            <a:off x="566928" y="6236208"/>
+            <a:ext cx="10415016" cy="365760"/>
           </a:xfrm>
           <a:prstGeom prst="rect">
             <a:avLst/>
@@ -26292,54 +26379,15 @@
               <a:buNone/>
             </a:pPr>
             <a:r>
-              <a:rPr lang="en-US" sz="1450" b="1" dirty="0">
-                <a:solidFill>
-                  <a:srgbClr val="16233B"/>
+              <a:rPr lang="en-US" sz="1050" i="1" dirty="0">
+                <a:solidFill>
+                  <a:srgbClr val="5E6980"/>
                 </a:solidFill>
                 <a:latin typeface="Calibri" pitchFamily="34" charset="0"/>
                 <a:ea typeface="Calibri" pitchFamily="34" charset="-122"/>
                 <a:cs typeface="Calibri" pitchFamily="34" charset="-120"/>
               </a:rPr>
-              <a:t>So Sidekick should not average associates. It should learn what each cohort responds to, and give them that.</a:t>
-            </a:r>
-            <a:endParaRPr lang="en-US" sz="1450" dirty="0"/>
-          </a:p>
-        </p:txBody>
-      </p:sp>
-      <p:sp>
-        <p:nvSpPr>
-          <p:cNvPr id="21" name="Text 19"/>
-          <p:cNvSpPr/>
-          <p:nvPr/>
-        </p:nvSpPr>
-        <p:spPr>
-          <a:xfrm>
-            <a:off x="566928" y="6236208"/>
-            <a:ext cx="10415016" cy="365760"/>
-          </a:xfrm>
-          <a:prstGeom prst="rect">
-            <a:avLst/>
-          </a:prstGeom>
-          <a:noFill/>
-          <a:ln/>
-        </p:spPr>
-        <p:txBody>
-          <a:bodyPr wrap="square" lIns="0" tIns="0" rIns="0" bIns="0" rtlCol="0" anchor="ctr"/>
-          <a:lstStyle/>
-          <a:p>
-            <a:pPr indent="0" marL="0">
-              <a:buNone/>
-            </a:pPr>
-            <a:r>
-              <a:rPr lang="en-US" sz="1050" i="1" dirty="0">
-                <a:solidFill>
-                  <a:srgbClr val="5E6980"/>
-                </a:solidFill>
-                <a:latin typeface="Calibri" pitchFamily="34" charset="0"/>
-                <a:ea typeface="Calibri" pitchFamily="34" charset="-122"/>
-                <a:cs typeface="Calibri" pitchFamily="34" charset="-120"/>
-              </a:rPr>
-              <a:t>Three motives, not three personas. No invented biographies. Each maps to one of the reward types on the next slide.</a:t>
+              <a:t>Official Walmart photography. The quote on the wall behind the promotion is this deck's thesis, already stated. What is missing is anything that measures whether we deliver it.</a:t>
             </a:r>
             <a:endParaRPr lang="en-US" sz="1050" dirty="0"/>
           </a:p>
@@ -26347,7 +26395,7 @@
       </p:sp>
       <p:sp>
         <p:nvSpPr>
-          <p:cNvPr id="22" name="Text 20"/>
+          <p:cNvPr id="23" name="Text 19"/>
           <p:cNvSpPr/>
           <p:nvPr/>
         </p:nvSpPr>
@@ -36751,259 +36799,16 @@
         </p:nvSpPr>
         <p:spPr>
           <a:xfrm>
-            <a:off x="566928" y="1920240"/>
-            <a:ext cx="2592324" cy="2926080"/>
+            <a:off x="1168146" y="1901952"/>
+            <a:ext cx="1389888" cy="2865748"/>
           </a:xfrm>
           <a:prstGeom prst="roundRect">
             <a:avLst>
-              <a:gd name="adj" fmla="val 4233"/>
+              <a:gd name="adj" fmla="val 9211"/>
             </a:avLst>
           </a:prstGeom>
           <a:solidFill>
-            <a:srgbClr val="DCE9F2"/>
-          </a:solidFill>
-          <a:ln w="12700">
-            <a:solidFill>
-              <a:srgbClr val="DCE9F2"/>
-            </a:solidFill>
-            <a:prstDash val="solid"/>
-          </a:ln>
-        </p:spPr>
-      </p:sp>
-      <p:sp>
-        <p:nvSpPr>
-          <p:cNvPr id="6" name="Shape 4"/>
-          <p:cNvSpPr/>
-          <p:nvPr/>
-        </p:nvSpPr>
-        <p:spPr>
-          <a:xfrm>
-            <a:off x="731520" y="2103120"/>
-            <a:ext cx="1298448" cy="274320"/>
-          </a:xfrm>
-          <a:prstGeom prst="roundRect">
-            <a:avLst>
-              <a:gd name="adj" fmla="val 50000"/>
-            </a:avLst>
-          </a:prstGeom>
-          <a:solidFill>
-            <a:srgbClr val="3B7EA8"/>
-          </a:solidFill>
-          <a:ln w="12700">
-            <a:solidFill>
-              <a:srgbClr val="3B7EA8"/>
-            </a:solidFill>
-            <a:prstDash val="solid"/>
-          </a:ln>
-        </p:spPr>
-      </p:sp>
-      <p:sp>
-        <p:nvSpPr>
-          <p:cNvPr id="7" name="Text 5"/>
-          <p:cNvSpPr/>
-          <p:nvPr/>
-        </p:nvSpPr>
-        <p:spPr>
-          <a:xfrm>
-            <a:off x="731520" y="2103120"/>
-            <a:ext cx="1298448" cy="274320"/>
-          </a:xfrm>
-          <a:prstGeom prst="rect">
-            <a:avLst/>
-          </a:prstGeom>
-          <a:noFill/>
-          <a:ln/>
-        </p:spPr>
-        <p:txBody>
-          <a:bodyPr wrap="square" lIns="0" tIns="0" rIns="0" bIns="0" rtlCol="0" anchor="ctr"/>
-          <a:lstStyle/>
-          <a:p>
-            <a:pPr algn="ctr" indent="0" marL="0">
-              <a:buNone/>
-            </a:pPr>
-            <a:r>
-              <a:rPr lang="en-US" sz="950" b="1" dirty="0">
-                <a:solidFill>
-                  <a:srgbClr val="FFFFFF"/>
-                </a:solidFill>
-                <a:latin typeface="Calibri" pitchFamily="34" charset="0"/>
-                <a:ea typeface="Calibri" pitchFamily="34" charset="-122"/>
-                <a:cs typeface="Calibri" pitchFamily="34" charset="-120"/>
-              </a:rPr>
-              <a:t>Proactive</a:t>
-            </a:r>
-            <a:endParaRPr lang="en-US" sz="950" dirty="0"/>
-          </a:p>
-        </p:txBody>
-      </p:sp>
-      <p:sp>
-        <p:nvSpPr>
-          <p:cNvPr id="8" name="Text 6"/>
-          <p:cNvSpPr/>
-          <p:nvPr/>
-        </p:nvSpPr>
-        <p:spPr>
-          <a:xfrm>
-            <a:off x="731520" y="2487168"/>
-            <a:ext cx="2263140" cy="256032"/>
-          </a:xfrm>
-          <a:prstGeom prst="rect">
-            <a:avLst/>
-          </a:prstGeom>
-          <a:noFill/>
-          <a:ln/>
-        </p:spPr>
-        <p:txBody>
-          <a:bodyPr wrap="square" lIns="0" tIns="0" rIns="0" bIns="0" rtlCol="0" anchor="ctr"/>
-          <a:lstStyle/>
-          <a:p>
-            <a:pPr indent="0" marL="0">
-              <a:buNone/>
-            </a:pPr>
-            <a:r>
-              <a:rPr lang="en-US" sz="1050" b="1" dirty="0">
-                <a:solidFill>
-                  <a:srgbClr val="5E6980"/>
-                </a:solidFill>
-                <a:latin typeface="Calibri" pitchFamily="34" charset="0"/>
-                <a:ea typeface="Calibri" pitchFamily="34" charset="-122"/>
-                <a:cs typeface="Calibri" pitchFamily="34" charset="-120"/>
-              </a:rPr>
-              <a:t>Day 1  ·  6:55am</a:t>
-            </a:r>
-            <a:endParaRPr lang="en-US" sz="1050" dirty="0"/>
-          </a:p>
-        </p:txBody>
-      </p:sp>
-      <p:sp>
-        <p:nvSpPr>
-          <p:cNvPr id="9" name="Text 7"/>
-          <p:cNvSpPr/>
-          <p:nvPr/>
-        </p:nvSpPr>
-        <p:spPr>
-          <a:xfrm>
-            <a:off x="731520" y="2761488"/>
-            <a:ext cx="2263140" cy="603504"/>
-          </a:xfrm>
-          <a:prstGeom prst="rect">
-            <a:avLst/>
-          </a:prstGeom>
-          <a:noFill/>
-          <a:ln/>
-        </p:spPr>
-        <p:txBody>
-          <a:bodyPr wrap="square" lIns="0" tIns="0" rIns="0" bIns="0" rtlCol="0" anchor="t"/>
-          <a:lstStyle/>
-          <a:p>
-            <a:pPr indent="0" marL="0">
-              <a:lnSpc>
-                <a:spcPts val="1900"/>
-              </a:lnSpc>
-              <a:buNone/>
-            </a:pPr>
-            <a:r>
-              <a:rPr lang="en-US" sz="1550" b="1" dirty="0">
-                <a:solidFill>
-                  <a:srgbClr val="1E4E6B"/>
-                </a:solidFill>
-                <a:latin typeface="Cambria" pitchFamily="34" charset="0"/>
-                <a:ea typeface="Cambria" pitchFamily="34" charset="-122"/>
-                <a:cs typeface="Cambria" pitchFamily="34" charset="-120"/>
-              </a:rPr>
-              <a:t>The app speaks first</a:t>
-            </a:r>
-            <a:endParaRPr lang="en-US" sz="1550" dirty="0"/>
-          </a:p>
-        </p:txBody>
-      </p:sp>
-      <p:sp>
-        <p:nvSpPr>
-          <p:cNvPr id="10" name="Text 8"/>
-          <p:cNvSpPr/>
-          <p:nvPr/>
-        </p:nvSpPr>
-        <p:spPr>
-          <a:xfrm>
-            <a:off x="731520" y="3401568"/>
-            <a:ext cx="2263140" cy="1280160"/>
-          </a:xfrm>
-          <a:prstGeom prst="rect">
-            <a:avLst/>
-          </a:prstGeom>
-          <a:noFill/>
-          <a:ln/>
-        </p:spPr>
-        <p:txBody>
-          <a:bodyPr wrap="square" lIns="0" tIns="0" rIns="0" bIns="0" rtlCol="0" anchor="t"/>
-          <a:lstStyle/>
-          <a:p>
-            <a:pPr indent="0" marL="0">
-              <a:lnSpc>
-                <a:spcPts val="1600"/>
-              </a:lnSpc>
-              <a:buNone/>
-            </a:pPr>
-            <a:r>
-              <a:rPr lang="en-US" sz="1200" dirty="0">
-                <a:solidFill>
-                  <a:srgbClr val="1B2338"/>
-                </a:solidFill>
-                <a:latin typeface="Calibri" pitchFamily="34" charset="0"/>
-                <a:ea typeface="Calibri" pitchFamily="34" charset="-122"/>
-                <a:cs typeface="Calibri" pitchFamily="34" charset="-120"/>
-              </a:rPr>
-              <a:t>First shift today, Maya. Badge and locker first, then meet Dee, your buddy, aisle 12. I will guide each step when you arrive.</a:t>
-            </a:r>
-            <a:endParaRPr lang="en-US" sz="1200" dirty="0"/>
-          </a:p>
-        </p:txBody>
-      </p:sp>
-      <p:sp>
-        <p:nvSpPr>
-          <p:cNvPr id="11" name="Shape 9"/>
-          <p:cNvSpPr/>
-          <p:nvPr/>
-        </p:nvSpPr>
-        <p:spPr>
-          <a:xfrm>
-            <a:off x="3387852" y="1920240"/>
-            <a:ext cx="2592324" cy="2926080"/>
-          </a:xfrm>
-          <a:prstGeom prst="roundRect">
-            <a:avLst>
-              <a:gd name="adj" fmla="val 4233"/>
-            </a:avLst>
-          </a:prstGeom>
-          <a:solidFill>
-            <a:srgbClr val="E2EAF4"/>
-          </a:solidFill>
-          <a:ln w="12700">
-            <a:solidFill>
-              <a:srgbClr val="E2EAF4"/>
-            </a:solidFill>
-            <a:prstDash val="solid"/>
-          </a:ln>
-        </p:spPr>
-      </p:sp>
-      <p:sp>
-        <p:nvSpPr>
-          <p:cNvPr id="12" name="Shape 10"/>
-          <p:cNvSpPr/>
-          <p:nvPr/>
-        </p:nvSpPr>
-        <p:spPr>
-          <a:xfrm>
-            <a:off x="3552444" y="2103120"/>
-            <a:ext cx="1298448" cy="274320"/>
-          </a:xfrm>
-          <a:prstGeom prst="roundRect">
-            <a:avLst>
-              <a:gd name="adj" fmla="val 50000"/>
-            </a:avLst>
-          </a:prstGeom>
-          <a:solidFill>
-            <a:srgbClr val="2E4571"/>
+            <a:srgbClr val="16233B"/>
           </a:solidFill>
           <a:ln w="12700">
             <a:solidFill>
@@ -37015,188 +36820,26 @@
       </p:sp>
       <p:sp>
         <p:nvSpPr>
-          <p:cNvPr id="13" name="Text 11"/>
-          <p:cNvSpPr/>
-          <p:nvPr/>
-        </p:nvSpPr>
-        <p:spPr>
-          <a:xfrm>
-            <a:off x="3552444" y="2103120"/>
-            <a:ext cx="1298448" cy="274320"/>
-          </a:xfrm>
-          <a:prstGeom prst="rect">
-            <a:avLst/>
-          </a:prstGeom>
-          <a:noFill/>
-          <a:ln/>
-        </p:spPr>
-        <p:txBody>
-          <a:bodyPr wrap="square" lIns="0" tIns="0" rIns="0" bIns="0" rtlCol="0" anchor="ctr"/>
-          <a:lstStyle/>
-          <a:p>
-            <a:pPr algn="ctr" indent="0" marL="0">
-              <a:buNone/>
-            </a:pPr>
-            <a:r>
-              <a:rPr lang="en-US" sz="950" b="1" dirty="0">
-                <a:solidFill>
-                  <a:srgbClr val="FFFFFF"/>
-                </a:solidFill>
-                <a:latin typeface="Calibri" pitchFamily="34" charset="0"/>
-                <a:ea typeface="Calibri" pitchFamily="34" charset="-122"/>
-                <a:cs typeface="Calibri" pitchFamily="34" charset="-120"/>
-              </a:rPr>
-              <a:t>Conversational</a:t>
-            </a:r>
-            <a:endParaRPr lang="en-US" sz="950" dirty="0"/>
-          </a:p>
-        </p:txBody>
-      </p:sp>
-      <p:sp>
-        <p:nvSpPr>
-          <p:cNvPr id="14" name="Text 12"/>
-          <p:cNvSpPr/>
-          <p:nvPr/>
-        </p:nvSpPr>
-        <p:spPr>
-          <a:xfrm>
-            <a:off x="3552444" y="2487168"/>
-            <a:ext cx="2263140" cy="256032"/>
-          </a:xfrm>
-          <a:prstGeom prst="rect">
-            <a:avLst/>
-          </a:prstGeom>
-          <a:noFill/>
-          <a:ln/>
-        </p:spPr>
-        <p:txBody>
-          <a:bodyPr wrap="square" lIns="0" tIns="0" rIns="0" bIns="0" rtlCol="0" anchor="ctr"/>
-          <a:lstStyle/>
-          <a:p>
-            <a:pPr indent="0" marL="0">
-              <a:buNone/>
-            </a:pPr>
-            <a:r>
-              <a:rPr lang="en-US" sz="1050" b="1" dirty="0">
-                <a:solidFill>
-                  <a:srgbClr val="5E6980"/>
-                </a:solidFill>
-                <a:latin typeface="Calibri" pitchFamily="34" charset="0"/>
-                <a:ea typeface="Calibri" pitchFamily="34" charset="-122"/>
-                <a:cs typeface="Calibri" pitchFamily="34" charset="-120"/>
-              </a:rPr>
-              <a:t>Shift 1</a:t>
-            </a:r>
-            <a:endParaRPr lang="en-US" sz="1050" dirty="0"/>
-          </a:p>
-        </p:txBody>
-      </p:sp>
-      <p:sp>
-        <p:nvSpPr>
-          <p:cNvPr id="15" name="Text 13"/>
-          <p:cNvSpPr/>
-          <p:nvPr/>
-        </p:nvSpPr>
-        <p:spPr>
-          <a:xfrm>
-            <a:off x="3552444" y="2761488"/>
-            <a:ext cx="2263140" cy="603504"/>
-          </a:xfrm>
-          <a:prstGeom prst="rect">
-            <a:avLst/>
-          </a:prstGeom>
-          <a:noFill/>
-          <a:ln/>
-        </p:spPr>
-        <p:txBody>
-          <a:bodyPr wrap="square" lIns="0" tIns="0" rIns="0" bIns="0" rtlCol="0" anchor="t"/>
-          <a:lstStyle/>
-          <a:p>
-            <a:pPr indent="0" marL="0">
-              <a:lnSpc>
-                <a:spcPts val="1900"/>
-              </a:lnSpc>
-              <a:buNone/>
-            </a:pPr>
-            <a:r>
-              <a:rPr lang="en-US" sz="1550" b="1" dirty="0">
-                <a:solidFill>
-                  <a:srgbClr val="16233B"/>
-                </a:solidFill>
-                <a:latin typeface="Cambria" pitchFamily="34" charset="0"/>
-                <a:ea typeface="Cambria" pitchFamily="34" charset="-122"/>
-                <a:cs typeface="Cambria" pitchFamily="34" charset="-120"/>
-              </a:rPr>
-              <a:t>Zero-tenure vocabulary</a:t>
-            </a:r>
-            <a:endParaRPr lang="en-US" sz="1550" dirty="0"/>
-          </a:p>
-        </p:txBody>
-      </p:sp>
-      <p:sp>
-        <p:nvSpPr>
-          <p:cNvPr id="16" name="Text 14"/>
-          <p:cNvSpPr/>
-          <p:nvPr/>
-        </p:nvSpPr>
-        <p:spPr>
-          <a:xfrm>
-            <a:off x="3552444" y="3401568"/>
-            <a:ext cx="2263140" cy="1280160"/>
-          </a:xfrm>
-          <a:prstGeom prst="rect">
-            <a:avLst/>
-          </a:prstGeom>
-          <a:noFill/>
-          <a:ln/>
-        </p:spPr>
-        <p:txBody>
-          <a:bodyPr wrap="square" lIns="0" tIns="0" rIns="0" bIns="0" rtlCol="0" anchor="t"/>
-          <a:lstStyle/>
-          <a:p>
-            <a:pPr indent="0" marL="0">
-              <a:lnSpc>
-                <a:spcPts val="1600"/>
-              </a:lnSpc>
-              <a:buNone/>
-            </a:pPr>
-            <a:r>
-              <a:rPr lang="en-US" sz="1200" dirty="0">
-                <a:solidFill>
-                  <a:srgbClr val="1B2338"/>
-                </a:solidFill>
-                <a:latin typeface="Calibri" pitchFamily="34" charset="0"/>
-                <a:ea typeface="Calibri" pitchFamily="34" charset="-122"/>
-                <a:cs typeface="Calibri" pitchFamily="34" charset="-120"/>
-              </a:rPr>
-              <a:t>“What's a zone?”  Your assigned section for the night. Yours is GM-3, aisles 10 to 14. Dee walks the first pass with you.</a:t>
-            </a:r>
-            <a:endParaRPr lang="en-US" sz="1200" dirty="0"/>
-          </a:p>
-        </p:txBody>
-      </p:sp>
-      <p:sp>
-        <p:nvSpPr>
-          <p:cNvPr id="17" name="Shape 15"/>
-          <p:cNvSpPr/>
-          <p:nvPr/>
-        </p:nvSpPr>
-        <p:spPr>
-          <a:xfrm>
-            <a:off x="6208776" y="1920240"/>
-            <a:ext cx="2592324" cy="2926080"/>
+          <p:cNvPr id="6" name="Shape 4"/>
+          <p:cNvSpPr/>
+          <p:nvPr/>
+        </p:nvSpPr>
+        <p:spPr>
+          <a:xfrm>
+            <a:off x="1218438" y="1952244"/>
+            <a:ext cx="1289304" cy="2765164"/>
           </a:xfrm>
           <a:prstGeom prst="roundRect">
             <a:avLst>
-              <a:gd name="adj" fmla="val 4233"/>
+              <a:gd name="adj" fmla="val 7092"/>
             </a:avLst>
           </a:prstGeom>
           <a:solidFill>
-            <a:srgbClr val="FAECD4"/>
+            <a:srgbClr val="FFFFFF"/>
           </a:solidFill>
           <a:ln w="12700">
             <a:solidFill>
-              <a:srgbClr val="FAECD4"/>
+              <a:srgbClr val="333333"/>
             </a:solidFill>
             <a:prstDash val="solid"/>
           </a:ln>
@@ -37204,14 +36847,41 @@
       </p:sp>
       <p:sp>
         <p:nvSpPr>
-          <p:cNvPr id="18" name="Shape 16"/>
-          <p:cNvSpPr/>
-          <p:nvPr/>
-        </p:nvSpPr>
-        <p:spPr>
-          <a:xfrm>
-            <a:off x="6373368" y="2103120"/>
-            <a:ext cx="1298448" cy="274320"/>
+          <p:cNvPr id="7" name="Shape 5"/>
+          <p:cNvSpPr/>
+          <p:nvPr/>
+        </p:nvSpPr>
+        <p:spPr>
+          <a:xfrm>
+            <a:off x="1661922" y="1963217"/>
+            <a:ext cx="402336" cy="68580"/>
+          </a:xfrm>
+          <a:prstGeom prst="roundRect">
+            <a:avLst>
+              <a:gd name="adj" fmla="val 49333"/>
+            </a:avLst>
+          </a:prstGeom>
+          <a:solidFill>
+            <a:srgbClr val="16233B"/>
+          </a:solidFill>
+          <a:ln w="12700">
+            <a:solidFill>
+              <a:srgbClr val="333333"/>
+            </a:solidFill>
+            <a:prstDash val="solid"/>
+          </a:ln>
+        </p:spPr>
+      </p:sp>
+      <p:sp>
+        <p:nvSpPr>
+          <p:cNvPr id="8" name="Shape 6"/>
+          <p:cNvSpPr/>
+          <p:nvPr/>
+        </p:nvSpPr>
+        <p:spPr>
+          <a:xfrm>
+            <a:off x="1643634" y="4644256"/>
+            <a:ext cx="438912" cy="25603"/>
           </a:xfrm>
           <a:prstGeom prst="roundRect">
             <a:avLst>
@@ -37219,7 +36889,1569 @@
             </a:avLst>
           </a:prstGeom>
           <a:solidFill>
+            <a:srgbClr val="C6CFDD"/>
+          </a:solidFill>
+          <a:ln w="12700">
+            <a:solidFill>
+              <a:srgbClr val="333333"/>
+            </a:solidFill>
+            <a:prstDash val="solid"/>
+          </a:ln>
+        </p:spPr>
+      </p:sp>
+      <p:sp>
+        <p:nvSpPr>
+          <p:cNvPr id="9" name="Text 7"/>
+          <p:cNvSpPr/>
+          <p:nvPr/>
+        </p:nvSpPr>
+        <p:spPr>
+          <a:xfrm>
+            <a:off x="1309878" y="1965960"/>
+            <a:ext cx="1106424" cy="146304"/>
+          </a:xfrm>
+          <a:prstGeom prst="rect">
+            <a:avLst/>
+          </a:prstGeom>
+          <a:noFill/>
+          <a:ln/>
+        </p:spPr>
+        <p:txBody>
+          <a:bodyPr wrap="square" lIns="0" tIns="0" rIns="0" bIns="0" rtlCol="0" anchor="ctr"/>
+          <a:lstStyle/>
+          <a:p>
+            <a:pPr indent="0" marL="0">
+              <a:buNone/>
+            </a:pPr>
+            <a:r>
+              <a:rPr lang="en-US" sz="600" b="1" dirty="0">
+                <a:solidFill>
+                  <a:srgbClr val="1B2338"/>
+                </a:solidFill>
+                <a:latin typeface="Calibri" pitchFamily="34" charset="0"/>
+                <a:ea typeface="Calibri" pitchFamily="34" charset="-122"/>
+                <a:cs typeface="Calibri" pitchFamily="34" charset="-120"/>
+              </a:rPr>
+              <a:t>6:55</a:t>
+            </a:r>
+            <a:endParaRPr lang="en-US" sz="600" dirty="0"/>
+          </a:p>
+        </p:txBody>
+      </p:sp>
+      <p:sp>
+        <p:nvSpPr>
+          <p:cNvPr id="10" name="Text 8"/>
+          <p:cNvSpPr/>
+          <p:nvPr/>
+        </p:nvSpPr>
+        <p:spPr>
+          <a:xfrm>
+            <a:off x="1309878" y="1965960"/>
+            <a:ext cx="1106424" cy="146304"/>
+          </a:xfrm>
+          <a:prstGeom prst="rect">
+            <a:avLst/>
+          </a:prstGeom>
+          <a:noFill/>
+          <a:ln/>
+        </p:spPr>
+        <p:txBody>
+          <a:bodyPr wrap="square" lIns="0" tIns="0" rIns="0" bIns="0" rtlCol="0" anchor="ctr"/>
+          <a:lstStyle/>
+          <a:p>
+            <a:pPr algn="r" indent="0" marL="0">
+              <a:buNone/>
+            </a:pPr>
+            <a:r>
+              <a:rPr lang="en-US" sz="500" dirty="0">
+                <a:solidFill>
+                  <a:srgbClr val="5E6980"/>
+                </a:solidFill>
+                <a:latin typeface="Calibri" pitchFamily="34" charset="0"/>
+                <a:ea typeface="Calibri" pitchFamily="34" charset="-122"/>
+                <a:cs typeface="Calibri" pitchFamily="34" charset="-120"/>
+              </a:rPr>
+              <a:t>▮▮▮</a:t>
+            </a:r>
+            <a:endParaRPr lang="en-US" sz="500" dirty="0"/>
+          </a:p>
+        </p:txBody>
+      </p:sp>
+      <p:sp>
+        <p:nvSpPr>
+          <p:cNvPr id="11" name="Text 9"/>
+          <p:cNvSpPr/>
+          <p:nvPr/>
+        </p:nvSpPr>
+        <p:spPr>
+          <a:xfrm>
+            <a:off x="1218438" y="2171700"/>
+            <a:ext cx="1289304" cy="146304"/>
+          </a:xfrm>
+          <a:prstGeom prst="rect">
+            <a:avLst/>
+          </a:prstGeom>
+          <a:noFill/>
+          <a:ln/>
+        </p:spPr>
+        <p:txBody>
+          <a:bodyPr wrap="square" lIns="0" tIns="0" rIns="0" bIns="0" rtlCol="0" anchor="ctr"/>
+          <a:lstStyle/>
+          <a:p>
+            <a:pPr algn="ctr" indent="0" marL="0">
+              <a:buNone/>
+            </a:pPr>
+            <a:r>
+              <a:rPr lang="en-US" sz="600" dirty="0">
+                <a:solidFill>
+                  <a:srgbClr val="5E6980"/>
+                </a:solidFill>
+                <a:latin typeface="Calibri" pitchFamily="34" charset="0"/>
+                <a:ea typeface="Calibri" pitchFamily="34" charset="-122"/>
+                <a:cs typeface="Calibri" pitchFamily="34" charset="-120"/>
+              </a:rPr>
+              <a:t>Monday</a:t>
+            </a:r>
+            <a:endParaRPr lang="en-US" sz="600" dirty="0"/>
+          </a:p>
+        </p:txBody>
+      </p:sp>
+      <p:sp>
+        <p:nvSpPr>
+          <p:cNvPr id="12" name="Text 10"/>
+          <p:cNvSpPr/>
+          <p:nvPr/>
+        </p:nvSpPr>
+        <p:spPr>
+          <a:xfrm>
+            <a:off x="1218438" y="2318004"/>
+            <a:ext cx="1289304" cy="420624"/>
+          </a:xfrm>
+          <a:prstGeom prst="rect">
+            <a:avLst/>
+          </a:prstGeom>
+          <a:noFill/>
+          <a:ln/>
+        </p:spPr>
+        <p:txBody>
+          <a:bodyPr wrap="square" lIns="0" tIns="0" rIns="0" bIns="0" rtlCol="0" anchor="ctr"/>
+          <a:lstStyle/>
+          <a:p>
+            <a:pPr algn="ctr" indent="0" marL="0">
+              <a:buNone/>
+            </a:pPr>
+            <a:r>
+              <a:rPr lang="en-US" sz="2700" b="1" dirty="0">
+                <a:solidFill>
+                  <a:srgbClr val="1B2338"/>
+                </a:solidFill>
+                <a:latin typeface="Cambria" pitchFamily="34" charset="0"/>
+                <a:ea typeface="Cambria" pitchFamily="34" charset="-122"/>
+                <a:cs typeface="Cambria" pitchFamily="34" charset="-120"/>
+              </a:rPr>
+              <a:t>6:55</a:t>
+            </a:r>
+            <a:endParaRPr lang="en-US" sz="2700" dirty="0"/>
+          </a:p>
+        </p:txBody>
+      </p:sp>
+      <p:sp>
+        <p:nvSpPr>
+          <p:cNvPr id="13" name="Shape 11"/>
+          <p:cNvSpPr/>
+          <p:nvPr/>
+        </p:nvSpPr>
+        <p:spPr>
+          <a:xfrm>
+            <a:off x="1291590" y="2848356"/>
+            <a:ext cx="1143000" cy="841248"/>
+          </a:xfrm>
+          <a:prstGeom prst="roundRect">
+            <a:avLst>
+              <a:gd name="adj" fmla="val 7609"/>
+            </a:avLst>
+          </a:prstGeom>
+          <a:solidFill>
+            <a:srgbClr val="F1F5FA"/>
+          </a:solidFill>
+          <a:ln w="9525">
+            <a:solidFill>
+              <a:srgbClr val="E2EAF4"/>
+            </a:solidFill>
+            <a:prstDash val="solid"/>
+          </a:ln>
+        </p:spPr>
+      </p:sp>
+      <p:sp>
+        <p:nvSpPr>
+          <p:cNvPr id="14" name="Shape 12"/>
+          <p:cNvSpPr/>
+          <p:nvPr/>
+        </p:nvSpPr>
+        <p:spPr>
+          <a:xfrm>
+            <a:off x="1355598" y="2912364"/>
+            <a:ext cx="118872" cy="118872"/>
+          </a:xfrm>
+          <a:prstGeom prst="roundRect">
+            <a:avLst>
+              <a:gd name="adj" fmla="val 23077"/>
+            </a:avLst>
+          </a:prstGeom>
+          <a:solidFill>
+            <a:srgbClr val="3B7EA8"/>
+          </a:solidFill>
+          <a:ln w="12700">
+            <a:solidFill>
+              <a:srgbClr val="333333"/>
+            </a:solidFill>
+            <a:prstDash val="solid"/>
+          </a:ln>
+        </p:spPr>
+      </p:sp>
+      <p:sp>
+        <p:nvSpPr>
+          <p:cNvPr id="15" name="Text 13"/>
+          <p:cNvSpPr/>
+          <p:nvPr/>
+        </p:nvSpPr>
+        <p:spPr>
+          <a:xfrm>
+            <a:off x="1511046" y="2903220"/>
+            <a:ext cx="905256" cy="137160"/>
+          </a:xfrm>
+          <a:prstGeom prst="rect">
+            <a:avLst/>
+          </a:prstGeom>
+          <a:noFill/>
+          <a:ln/>
+        </p:spPr>
+        <p:txBody>
+          <a:bodyPr wrap="square" lIns="0" tIns="0" rIns="0" bIns="0" rtlCol="0" anchor="ctr"/>
+          <a:lstStyle/>
+          <a:p>
+            <a:pPr indent="0" marL="0">
+              <a:buNone/>
+            </a:pPr>
+            <a:r>
+              <a:rPr lang="en-US" sz="550" b="1" dirty="0">
+                <a:solidFill>
+                  <a:srgbClr val="5E6980"/>
+                </a:solidFill>
+                <a:latin typeface="Calibri" pitchFamily="34" charset="0"/>
+                <a:ea typeface="Calibri" pitchFamily="34" charset="-122"/>
+                <a:cs typeface="Calibri" pitchFamily="34" charset="-120"/>
+              </a:rPr>
+              <a:t>Sidekick  ·  now</a:t>
+            </a:r>
+            <a:endParaRPr lang="en-US" sz="550" dirty="0"/>
+          </a:p>
+        </p:txBody>
+      </p:sp>
+      <p:sp>
+        <p:nvSpPr>
+          <p:cNvPr id="16" name="Text 14"/>
+          <p:cNvSpPr/>
+          <p:nvPr/>
+        </p:nvSpPr>
+        <p:spPr>
+          <a:xfrm>
+            <a:off x="1355598" y="3086100"/>
+            <a:ext cx="1014984" cy="566928"/>
+          </a:xfrm>
+          <a:prstGeom prst="rect">
+            <a:avLst/>
+          </a:prstGeom>
+          <a:noFill/>
+          <a:ln/>
+        </p:spPr>
+        <p:txBody>
+          <a:bodyPr wrap="square" lIns="0" tIns="0" rIns="0" bIns="0" rtlCol="0" anchor="t"/>
+          <a:lstStyle/>
+          <a:p>
+            <a:pPr indent="0" marL="0">
+              <a:lnSpc>
+                <a:spcPts val="850"/>
+              </a:lnSpc>
+              <a:buNone/>
+            </a:pPr>
+            <a:r>
+              <a:rPr lang="en-US" sz="650" dirty="0">
+                <a:solidFill>
+                  <a:srgbClr val="1B2338"/>
+                </a:solidFill>
+                <a:latin typeface="Calibri" pitchFamily="34" charset="0"/>
+                <a:ea typeface="Calibri" pitchFamily="34" charset="-122"/>
+                <a:cs typeface="Calibri" pitchFamily="34" charset="-120"/>
+              </a:rPr>
+              <a:t>First shift today, Maya. Badge and locker first, then meet Dee, your buddy, aisle 12. I will guide each step when you arrive.</a:t>
+            </a:r>
+            <a:endParaRPr lang="en-US" sz="650" dirty="0"/>
+          </a:p>
+        </p:txBody>
+      </p:sp>
+      <p:sp>
+        <p:nvSpPr>
+          <p:cNvPr id="17" name="Shape 15"/>
+          <p:cNvSpPr/>
+          <p:nvPr/>
+        </p:nvSpPr>
+        <p:spPr>
+          <a:xfrm>
+            <a:off x="566928" y="4895716"/>
+            <a:ext cx="1298448" cy="256032"/>
+          </a:xfrm>
+          <a:prstGeom prst="roundRect">
+            <a:avLst>
+              <a:gd name="adj" fmla="val 50000"/>
+            </a:avLst>
+          </a:prstGeom>
+          <a:solidFill>
+            <a:srgbClr val="3B7EA8"/>
+          </a:solidFill>
+          <a:ln w="12700">
+            <a:solidFill>
+              <a:srgbClr val="333333"/>
+            </a:solidFill>
+            <a:prstDash val="solid"/>
+          </a:ln>
+        </p:spPr>
+      </p:sp>
+      <p:sp>
+        <p:nvSpPr>
+          <p:cNvPr id="18" name="Text 16"/>
+          <p:cNvSpPr/>
+          <p:nvPr/>
+        </p:nvSpPr>
+        <p:spPr>
+          <a:xfrm>
+            <a:off x="566928" y="4895716"/>
+            <a:ext cx="1298448" cy="256032"/>
+          </a:xfrm>
+          <a:prstGeom prst="rect">
+            <a:avLst/>
+          </a:prstGeom>
+          <a:noFill/>
+          <a:ln/>
+        </p:spPr>
+        <p:txBody>
+          <a:bodyPr wrap="square" lIns="0" tIns="0" rIns="0" bIns="0" rtlCol="0" anchor="ctr"/>
+          <a:lstStyle/>
+          <a:p>
+            <a:pPr algn="ctr" indent="0" marL="0">
+              <a:buNone/>
+            </a:pPr>
+            <a:r>
+              <a:rPr lang="en-US" sz="900" b="1" dirty="0">
+                <a:solidFill>
+                  <a:srgbClr val="FFFFFF"/>
+                </a:solidFill>
+                <a:latin typeface="Calibri" pitchFamily="34" charset="0"/>
+                <a:ea typeface="Calibri" pitchFamily="34" charset="-122"/>
+                <a:cs typeface="Calibri" pitchFamily="34" charset="-120"/>
+              </a:rPr>
+              <a:t>Proactive</a:t>
+            </a:r>
+            <a:endParaRPr lang="en-US" sz="900" dirty="0"/>
+          </a:p>
+        </p:txBody>
+      </p:sp>
+      <p:sp>
+        <p:nvSpPr>
+          <p:cNvPr id="19" name="Text 17"/>
+          <p:cNvSpPr/>
+          <p:nvPr/>
+        </p:nvSpPr>
+        <p:spPr>
+          <a:xfrm>
+            <a:off x="1938528" y="4895716"/>
+            <a:ext cx="1220724" cy="256032"/>
+          </a:xfrm>
+          <a:prstGeom prst="rect">
+            <a:avLst/>
+          </a:prstGeom>
+          <a:noFill/>
+          <a:ln/>
+        </p:spPr>
+        <p:txBody>
+          <a:bodyPr wrap="square" lIns="0" tIns="0" rIns="0" bIns="0" rtlCol="0" anchor="ctr"/>
+          <a:lstStyle/>
+          <a:p>
+            <a:pPr indent="0" marL="0">
+              <a:buNone/>
+            </a:pPr>
+            <a:r>
+              <a:rPr lang="en-US" sz="900" b="1" dirty="0">
+                <a:solidFill>
+                  <a:srgbClr val="5E6980"/>
+                </a:solidFill>
+                <a:latin typeface="Calibri" pitchFamily="34" charset="0"/>
+                <a:ea typeface="Calibri" pitchFamily="34" charset="-122"/>
+                <a:cs typeface="Calibri" pitchFamily="34" charset="-120"/>
+              </a:rPr>
+              <a:t>Day 1  ·  6:55am</a:t>
+            </a:r>
+            <a:endParaRPr lang="en-US" sz="900" dirty="0"/>
+          </a:p>
+        </p:txBody>
+      </p:sp>
+      <p:sp>
+        <p:nvSpPr>
+          <p:cNvPr id="20" name="Text 18"/>
+          <p:cNvSpPr/>
+          <p:nvPr/>
+        </p:nvSpPr>
+        <p:spPr>
+          <a:xfrm>
+            <a:off x="566928" y="5188324"/>
+            <a:ext cx="2592324" cy="365760"/>
+          </a:xfrm>
+          <a:prstGeom prst="rect">
+            <a:avLst/>
+          </a:prstGeom>
+          <a:noFill/>
+          <a:ln/>
+        </p:spPr>
+        <p:txBody>
+          <a:bodyPr wrap="square" lIns="0" tIns="0" rIns="0" bIns="0" rtlCol="0" anchor="t"/>
+          <a:lstStyle/>
+          <a:p>
+            <a:pPr indent="0" marL="0">
+              <a:lnSpc>
+                <a:spcPts val="1700"/>
+              </a:lnSpc>
+              <a:buNone/>
+            </a:pPr>
+            <a:r>
+              <a:rPr lang="en-US" sz="1400" b="1" dirty="0">
+                <a:solidFill>
+                  <a:srgbClr val="1E4E6B"/>
+                </a:solidFill>
+                <a:latin typeface="Cambria" pitchFamily="34" charset="0"/>
+                <a:ea typeface="Cambria" pitchFamily="34" charset="-122"/>
+                <a:cs typeface="Cambria" pitchFamily="34" charset="-120"/>
+              </a:rPr>
+              <a:t>The app speaks first</a:t>
+            </a:r>
+            <a:endParaRPr lang="en-US" sz="1400" dirty="0"/>
+          </a:p>
+        </p:txBody>
+      </p:sp>
+      <p:sp>
+        <p:nvSpPr>
+          <p:cNvPr id="21" name="Shape 19"/>
+          <p:cNvSpPr/>
+          <p:nvPr/>
+        </p:nvSpPr>
+        <p:spPr>
+          <a:xfrm>
+            <a:off x="3989070" y="1901952"/>
+            <a:ext cx="1389888" cy="2865748"/>
+          </a:xfrm>
+          <a:prstGeom prst="roundRect">
+            <a:avLst>
+              <a:gd name="adj" fmla="val 9211"/>
+            </a:avLst>
+          </a:prstGeom>
+          <a:solidFill>
+            <a:srgbClr val="16233B"/>
+          </a:solidFill>
+          <a:ln w="12700">
+            <a:solidFill>
+              <a:srgbClr val="2E4571"/>
+            </a:solidFill>
+            <a:prstDash val="solid"/>
+          </a:ln>
+        </p:spPr>
+      </p:sp>
+      <p:sp>
+        <p:nvSpPr>
+          <p:cNvPr id="22" name="Shape 20"/>
+          <p:cNvSpPr/>
+          <p:nvPr/>
+        </p:nvSpPr>
+        <p:spPr>
+          <a:xfrm>
+            <a:off x="4039362" y="1952244"/>
+            <a:ext cx="1289304" cy="2765164"/>
+          </a:xfrm>
+          <a:prstGeom prst="roundRect">
+            <a:avLst>
+              <a:gd name="adj" fmla="val 7092"/>
+            </a:avLst>
+          </a:prstGeom>
+          <a:solidFill>
+            <a:srgbClr val="FFFFFF"/>
+          </a:solidFill>
+          <a:ln w="12700">
+            <a:solidFill>
+              <a:srgbClr val="333333"/>
+            </a:solidFill>
+            <a:prstDash val="solid"/>
+          </a:ln>
+        </p:spPr>
+      </p:sp>
+      <p:sp>
+        <p:nvSpPr>
+          <p:cNvPr id="23" name="Shape 21"/>
+          <p:cNvSpPr/>
+          <p:nvPr/>
+        </p:nvSpPr>
+        <p:spPr>
+          <a:xfrm>
+            <a:off x="4482846" y="1963217"/>
+            <a:ext cx="402336" cy="68580"/>
+          </a:xfrm>
+          <a:prstGeom prst="roundRect">
+            <a:avLst>
+              <a:gd name="adj" fmla="val 49333"/>
+            </a:avLst>
+          </a:prstGeom>
+          <a:solidFill>
+            <a:srgbClr val="16233B"/>
+          </a:solidFill>
+          <a:ln w="12700">
+            <a:solidFill>
+              <a:srgbClr val="333333"/>
+            </a:solidFill>
+            <a:prstDash val="solid"/>
+          </a:ln>
+        </p:spPr>
+      </p:sp>
+      <p:sp>
+        <p:nvSpPr>
+          <p:cNvPr id="24" name="Shape 22"/>
+          <p:cNvSpPr/>
+          <p:nvPr/>
+        </p:nvSpPr>
+        <p:spPr>
+          <a:xfrm>
+            <a:off x="4464558" y="4644256"/>
+            <a:ext cx="438912" cy="25603"/>
+          </a:xfrm>
+          <a:prstGeom prst="roundRect">
+            <a:avLst>
+              <a:gd name="adj" fmla="val 50000"/>
+            </a:avLst>
+          </a:prstGeom>
+          <a:solidFill>
+            <a:srgbClr val="C6CFDD"/>
+          </a:solidFill>
+          <a:ln w="12700">
+            <a:solidFill>
+              <a:srgbClr val="333333"/>
+            </a:solidFill>
+            <a:prstDash val="solid"/>
+          </a:ln>
+        </p:spPr>
+      </p:sp>
+      <p:sp>
+        <p:nvSpPr>
+          <p:cNvPr id="25" name="Text 23"/>
+          <p:cNvSpPr/>
+          <p:nvPr/>
+        </p:nvSpPr>
+        <p:spPr>
+          <a:xfrm>
+            <a:off x="4130802" y="1965960"/>
+            <a:ext cx="1106424" cy="146304"/>
+          </a:xfrm>
+          <a:prstGeom prst="rect">
+            <a:avLst/>
+          </a:prstGeom>
+          <a:noFill/>
+          <a:ln/>
+        </p:spPr>
+        <p:txBody>
+          <a:bodyPr wrap="square" lIns="0" tIns="0" rIns="0" bIns="0" rtlCol="0" anchor="ctr"/>
+          <a:lstStyle/>
+          <a:p>
+            <a:pPr indent="0" marL="0">
+              <a:buNone/>
+            </a:pPr>
+            <a:r>
+              <a:rPr lang="en-US" sz="600" b="1" dirty="0">
+                <a:solidFill>
+                  <a:srgbClr val="1B2338"/>
+                </a:solidFill>
+                <a:latin typeface="Calibri" pitchFamily="34" charset="0"/>
+                <a:ea typeface="Calibri" pitchFamily="34" charset="-122"/>
+                <a:cs typeface="Calibri" pitchFamily="34" charset="-120"/>
+              </a:rPr>
+              <a:t>21:14</a:t>
+            </a:r>
+            <a:endParaRPr lang="en-US" sz="600" dirty="0"/>
+          </a:p>
+        </p:txBody>
+      </p:sp>
+      <p:sp>
+        <p:nvSpPr>
+          <p:cNvPr id="26" name="Text 24"/>
+          <p:cNvSpPr/>
+          <p:nvPr/>
+        </p:nvSpPr>
+        <p:spPr>
+          <a:xfrm>
+            <a:off x="4130802" y="1965960"/>
+            <a:ext cx="1106424" cy="146304"/>
+          </a:xfrm>
+          <a:prstGeom prst="rect">
+            <a:avLst/>
+          </a:prstGeom>
+          <a:noFill/>
+          <a:ln/>
+        </p:spPr>
+        <p:txBody>
+          <a:bodyPr wrap="square" lIns="0" tIns="0" rIns="0" bIns="0" rtlCol="0" anchor="ctr"/>
+          <a:lstStyle/>
+          <a:p>
+            <a:pPr algn="r" indent="0" marL="0">
+              <a:buNone/>
+            </a:pPr>
+            <a:r>
+              <a:rPr lang="en-US" sz="500" dirty="0">
+                <a:solidFill>
+                  <a:srgbClr val="5E6980"/>
+                </a:solidFill>
+                <a:latin typeface="Calibri" pitchFamily="34" charset="0"/>
+                <a:ea typeface="Calibri" pitchFamily="34" charset="-122"/>
+                <a:cs typeface="Calibri" pitchFamily="34" charset="-120"/>
+              </a:rPr>
+              <a:t>▮▮▮</a:t>
+            </a:r>
+            <a:endParaRPr lang="en-US" sz="500" dirty="0"/>
+          </a:p>
+        </p:txBody>
+      </p:sp>
+      <p:sp>
+        <p:nvSpPr>
+          <p:cNvPr id="27" name="Shape 25"/>
+          <p:cNvSpPr/>
+          <p:nvPr/>
+        </p:nvSpPr>
+        <p:spPr>
+          <a:xfrm>
+            <a:off x="4039362" y="2135124"/>
+            <a:ext cx="1289304" cy="219456"/>
+          </a:xfrm>
+          <a:prstGeom prst="rect">
+            <a:avLst/>
+          </a:prstGeom>
+          <a:solidFill>
+            <a:srgbClr val="2E4571"/>
+          </a:solidFill>
+          <a:ln w="12700">
+            <a:solidFill>
+              <a:srgbClr val="333333"/>
+            </a:solidFill>
+            <a:prstDash val="solid"/>
+          </a:ln>
+        </p:spPr>
+      </p:sp>
+      <p:sp>
+        <p:nvSpPr>
+          <p:cNvPr id="28" name="Text 26"/>
+          <p:cNvSpPr/>
+          <p:nvPr/>
+        </p:nvSpPr>
+        <p:spPr>
+          <a:xfrm>
+            <a:off x="4130802" y="2135124"/>
+            <a:ext cx="1106424" cy="219456"/>
+          </a:xfrm>
+          <a:prstGeom prst="rect">
+            <a:avLst/>
+          </a:prstGeom>
+          <a:noFill/>
+          <a:ln/>
+        </p:spPr>
+        <p:txBody>
+          <a:bodyPr wrap="square" lIns="0" tIns="0" rIns="0" bIns="0" rtlCol="0" anchor="ctr"/>
+          <a:lstStyle/>
+          <a:p>
+            <a:pPr indent="0" marL="0">
+              <a:buNone/>
+            </a:pPr>
+            <a:r>
+              <a:rPr lang="en-US" sz="650" b="1" dirty="0">
+                <a:solidFill>
+                  <a:srgbClr val="FFFFFF"/>
+                </a:solidFill>
+                <a:latin typeface="Calibri" pitchFamily="34" charset="0"/>
+                <a:ea typeface="Calibri" pitchFamily="34" charset="-122"/>
+                <a:cs typeface="Calibri" pitchFamily="34" charset="-120"/>
+              </a:rPr>
+              <a:t>Sidekick</a:t>
+            </a:r>
+            <a:endParaRPr lang="en-US" sz="650" dirty="0"/>
+          </a:p>
+        </p:txBody>
+      </p:sp>
+      <p:sp>
+        <p:nvSpPr>
+          <p:cNvPr id="29" name="Shape 27"/>
+          <p:cNvSpPr/>
+          <p:nvPr/>
+        </p:nvSpPr>
+        <p:spPr>
+          <a:xfrm>
+            <a:off x="4214927" y="2427732"/>
+            <a:ext cx="1031443" cy="190246"/>
+          </a:xfrm>
+          <a:prstGeom prst="roundRect">
+            <a:avLst>
+              <a:gd name="adj" fmla="val 33645"/>
+            </a:avLst>
+          </a:prstGeom>
+          <a:solidFill>
+            <a:srgbClr val="E2EAF4"/>
+          </a:solidFill>
+          <a:ln w="12700">
+            <a:solidFill>
+              <a:srgbClr val="333333"/>
+            </a:solidFill>
+            <a:prstDash val="solid"/>
+          </a:ln>
+        </p:spPr>
+      </p:sp>
+      <p:sp>
+        <p:nvSpPr>
+          <p:cNvPr id="30" name="Text 28"/>
+          <p:cNvSpPr/>
+          <p:nvPr/>
+        </p:nvSpPr>
+        <p:spPr>
+          <a:xfrm>
+            <a:off x="4288079" y="2468880"/>
+            <a:ext cx="885139" cy="107950"/>
+          </a:xfrm>
+          <a:prstGeom prst="rect">
+            <a:avLst/>
+          </a:prstGeom>
+          <a:noFill/>
+          <a:ln/>
+        </p:spPr>
+        <p:txBody>
+          <a:bodyPr wrap="square" lIns="0" tIns="0" rIns="0" bIns="0" rtlCol="0" anchor="t"/>
+          <a:lstStyle/>
+          <a:p>
+            <a:pPr indent="0" marL="0">
+              <a:lnSpc>
+                <a:spcPts val="850"/>
+              </a:lnSpc>
+              <a:buNone/>
+            </a:pPr>
+            <a:r>
+              <a:rPr lang="en-US" sz="650" dirty="0">
+                <a:solidFill>
+                  <a:srgbClr val="1B2338"/>
+                </a:solidFill>
+                <a:latin typeface="Calibri" pitchFamily="34" charset="0"/>
+                <a:ea typeface="Calibri" pitchFamily="34" charset="-122"/>
+                <a:cs typeface="Calibri" pitchFamily="34" charset="-120"/>
+              </a:rPr>
+              <a:t>What's a zone?</a:t>
+            </a:r>
+            <a:endParaRPr lang="en-US" sz="650" dirty="0"/>
+          </a:p>
+        </p:txBody>
+      </p:sp>
+      <p:sp>
+        <p:nvSpPr>
+          <p:cNvPr id="31" name="Shape 29"/>
+          <p:cNvSpPr/>
+          <p:nvPr/>
+        </p:nvSpPr>
+        <p:spPr>
+          <a:xfrm>
+            <a:off x="4121658" y="2672842"/>
+            <a:ext cx="1031443" cy="406146"/>
+          </a:xfrm>
+          <a:prstGeom prst="roundRect">
+            <a:avLst>
+              <a:gd name="adj" fmla="val 15760"/>
+            </a:avLst>
+          </a:prstGeom>
+          <a:solidFill>
+            <a:srgbClr val="DCE9F2"/>
+          </a:solidFill>
+          <a:ln w="12700">
+            <a:solidFill>
+              <a:srgbClr val="333333"/>
+            </a:solidFill>
+            <a:prstDash val="solid"/>
+          </a:ln>
+        </p:spPr>
+      </p:sp>
+      <p:sp>
+        <p:nvSpPr>
+          <p:cNvPr id="32" name="Text 30"/>
+          <p:cNvSpPr/>
+          <p:nvPr/>
+        </p:nvSpPr>
+        <p:spPr>
+          <a:xfrm>
+            <a:off x="4194810" y="2713990"/>
+            <a:ext cx="885139" cy="323850"/>
+          </a:xfrm>
+          <a:prstGeom prst="rect">
+            <a:avLst/>
+          </a:prstGeom>
+          <a:noFill/>
+          <a:ln/>
+        </p:spPr>
+        <p:txBody>
+          <a:bodyPr wrap="square" lIns="0" tIns="0" rIns="0" bIns="0" rtlCol="0" anchor="t"/>
+          <a:lstStyle/>
+          <a:p>
+            <a:pPr indent="0" marL="0">
+              <a:lnSpc>
+                <a:spcPts val="850"/>
+              </a:lnSpc>
+              <a:buNone/>
+            </a:pPr>
+            <a:r>
+              <a:rPr lang="en-US" sz="650" dirty="0">
+                <a:solidFill>
+                  <a:srgbClr val="1E4E6B"/>
+                </a:solidFill>
+                <a:latin typeface="Calibri" pitchFamily="34" charset="0"/>
+                <a:ea typeface="Calibri" pitchFamily="34" charset="-122"/>
+                <a:cs typeface="Calibri" pitchFamily="34" charset="-120"/>
+              </a:rPr>
+              <a:t>Your section for tonight is GM-3, aisles 10 to 14.</a:t>
+            </a:r>
+            <a:endParaRPr lang="en-US" sz="650" dirty="0"/>
+          </a:p>
+        </p:txBody>
+      </p:sp>
+      <p:sp>
+        <p:nvSpPr>
+          <p:cNvPr id="33" name="Shape 31"/>
+          <p:cNvSpPr/>
+          <p:nvPr/>
+        </p:nvSpPr>
+        <p:spPr>
+          <a:xfrm>
+            <a:off x="4121658" y="3133852"/>
+            <a:ext cx="1031443" cy="406146"/>
+          </a:xfrm>
+          <a:prstGeom prst="roundRect">
+            <a:avLst>
+              <a:gd name="adj" fmla="val 15760"/>
+            </a:avLst>
+          </a:prstGeom>
+          <a:solidFill>
+            <a:srgbClr val="DCE9F2"/>
+          </a:solidFill>
+          <a:ln w="12700">
+            <a:solidFill>
+              <a:srgbClr val="333333"/>
+            </a:solidFill>
+            <a:prstDash val="solid"/>
+          </a:ln>
+        </p:spPr>
+      </p:sp>
+      <p:sp>
+        <p:nvSpPr>
+          <p:cNvPr id="34" name="Text 32"/>
+          <p:cNvSpPr/>
+          <p:nvPr/>
+        </p:nvSpPr>
+        <p:spPr>
+          <a:xfrm>
+            <a:off x="4194810" y="3175000"/>
+            <a:ext cx="885139" cy="323850"/>
+          </a:xfrm>
+          <a:prstGeom prst="rect">
+            <a:avLst/>
+          </a:prstGeom>
+          <a:noFill/>
+          <a:ln/>
+        </p:spPr>
+        <p:txBody>
+          <a:bodyPr wrap="square" lIns="0" tIns="0" rIns="0" bIns="0" rtlCol="0" anchor="t"/>
+          <a:lstStyle/>
+          <a:p>
+            <a:pPr indent="0" marL="0">
+              <a:lnSpc>
+                <a:spcPts val="850"/>
+              </a:lnSpc>
+              <a:buNone/>
+            </a:pPr>
+            <a:r>
+              <a:rPr lang="en-US" sz="650" dirty="0">
+                <a:solidFill>
+                  <a:srgbClr val="1E4E6B"/>
+                </a:solidFill>
+                <a:latin typeface="Calibri" pitchFamily="34" charset="0"/>
+                <a:ea typeface="Calibri" pitchFamily="34" charset="-122"/>
+                <a:cs typeface="Calibri" pitchFamily="34" charset="-120"/>
+              </a:rPr>
+              <a:t>Dee walks the first pass with you. Want me to ping her?</a:t>
+            </a:r>
+            <a:endParaRPr lang="en-US" sz="650" dirty="0"/>
+          </a:p>
+        </p:txBody>
+      </p:sp>
+      <p:sp>
+        <p:nvSpPr>
+          <p:cNvPr id="35" name="Shape 33"/>
+          <p:cNvSpPr/>
+          <p:nvPr/>
+        </p:nvSpPr>
+        <p:spPr>
+          <a:xfrm>
+            <a:off x="4214927" y="3594862"/>
+            <a:ext cx="1031443" cy="190246"/>
+          </a:xfrm>
+          <a:prstGeom prst="roundRect">
+            <a:avLst>
+              <a:gd name="adj" fmla="val 33645"/>
+            </a:avLst>
+          </a:prstGeom>
+          <a:solidFill>
+            <a:srgbClr val="E2EAF4"/>
+          </a:solidFill>
+          <a:ln w="12700">
+            <a:solidFill>
+              <a:srgbClr val="333333"/>
+            </a:solidFill>
+            <a:prstDash val="solid"/>
+          </a:ln>
+        </p:spPr>
+      </p:sp>
+      <p:sp>
+        <p:nvSpPr>
+          <p:cNvPr id="36" name="Text 34"/>
+          <p:cNvSpPr/>
+          <p:nvPr/>
+        </p:nvSpPr>
+        <p:spPr>
+          <a:xfrm>
+            <a:off x="4288079" y="3636010"/>
+            <a:ext cx="885139" cy="107950"/>
+          </a:xfrm>
+          <a:prstGeom prst="rect">
+            <a:avLst/>
+          </a:prstGeom>
+          <a:noFill/>
+          <a:ln/>
+        </p:spPr>
+        <p:txBody>
+          <a:bodyPr wrap="square" lIns="0" tIns="0" rIns="0" bIns="0" rtlCol="0" anchor="t"/>
+          <a:lstStyle/>
+          <a:p>
+            <a:pPr indent="0" marL="0">
+              <a:lnSpc>
+                <a:spcPts val="850"/>
+              </a:lnSpc>
+              <a:buNone/>
+            </a:pPr>
+            <a:r>
+              <a:rPr lang="en-US" sz="650" dirty="0">
+                <a:solidFill>
+                  <a:srgbClr val="1B2338"/>
+                </a:solidFill>
+                <a:latin typeface="Calibri" pitchFamily="34" charset="0"/>
+                <a:ea typeface="Calibri" pitchFamily="34" charset="-122"/>
+                <a:cs typeface="Calibri" pitchFamily="34" charset="-120"/>
+              </a:rPr>
+              <a:t>Yes please</a:t>
+            </a:r>
+            <a:endParaRPr lang="en-US" sz="650" dirty="0"/>
+          </a:p>
+        </p:txBody>
+      </p:sp>
+      <p:sp>
+        <p:nvSpPr>
+          <p:cNvPr id="37" name="Shape 35"/>
+          <p:cNvSpPr/>
+          <p:nvPr/>
+        </p:nvSpPr>
+        <p:spPr>
+          <a:xfrm>
+            <a:off x="4121658" y="3839972"/>
+            <a:ext cx="1031443" cy="406146"/>
+          </a:xfrm>
+          <a:prstGeom prst="roundRect">
+            <a:avLst>
+              <a:gd name="adj" fmla="val 15760"/>
+            </a:avLst>
+          </a:prstGeom>
+          <a:solidFill>
+            <a:srgbClr val="DCE9F2"/>
+          </a:solidFill>
+          <a:ln w="12700">
+            <a:solidFill>
+              <a:srgbClr val="333333"/>
+            </a:solidFill>
+            <a:prstDash val="solid"/>
+          </a:ln>
+        </p:spPr>
+      </p:sp>
+      <p:sp>
+        <p:nvSpPr>
+          <p:cNvPr id="38" name="Text 36"/>
+          <p:cNvSpPr/>
+          <p:nvPr/>
+        </p:nvSpPr>
+        <p:spPr>
+          <a:xfrm>
+            <a:off x="4194810" y="3881120"/>
+            <a:ext cx="885139" cy="323850"/>
+          </a:xfrm>
+          <a:prstGeom prst="rect">
+            <a:avLst/>
+          </a:prstGeom>
+          <a:noFill/>
+          <a:ln/>
+        </p:spPr>
+        <p:txBody>
+          <a:bodyPr wrap="square" lIns="0" tIns="0" rIns="0" bIns="0" rtlCol="0" anchor="t"/>
+          <a:lstStyle/>
+          <a:p>
+            <a:pPr indent="0" marL="0">
+              <a:lnSpc>
+                <a:spcPts val="850"/>
+              </a:lnSpc>
+              <a:buNone/>
+            </a:pPr>
+            <a:r>
+              <a:rPr lang="en-US" sz="650" dirty="0">
+                <a:solidFill>
+                  <a:srgbClr val="1E4E6B"/>
+                </a:solidFill>
+                <a:latin typeface="Calibri" pitchFamily="34" charset="0"/>
+                <a:ea typeface="Calibri" pitchFamily="34" charset="-122"/>
+                <a:cs typeface="Calibri" pitchFamily="34" charset="-120"/>
+              </a:rPr>
+              <a:t>Done. She will meet you at the time clock.</a:t>
+            </a:r>
+            <a:endParaRPr lang="en-US" sz="650" dirty="0"/>
+          </a:p>
+        </p:txBody>
+      </p:sp>
+      <p:sp>
+        <p:nvSpPr>
+          <p:cNvPr id="39" name="Shape 37"/>
+          <p:cNvSpPr/>
+          <p:nvPr/>
+        </p:nvSpPr>
+        <p:spPr>
+          <a:xfrm>
+            <a:off x="4121658" y="4388224"/>
+            <a:ext cx="1124712" cy="182880"/>
+          </a:xfrm>
+          <a:prstGeom prst="roundRect">
+            <a:avLst>
+              <a:gd name="adj" fmla="val 50000"/>
+            </a:avLst>
+          </a:prstGeom>
+          <a:solidFill>
+            <a:srgbClr val="F1F5FA"/>
+          </a:solidFill>
+          <a:ln w="9525">
+            <a:solidFill>
+              <a:srgbClr val="E2EAF4"/>
+            </a:solidFill>
+            <a:prstDash val="solid"/>
+          </a:ln>
+        </p:spPr>
+      </p:sp>
+      <p:sp>
+        <p:nvSpPr>
+          <p:cNvPr id="40" name="Text 38"/>
+          <p:cNvSpPr/>
+          <p:nvPr/>
+        </p:nvSpPr>
+        <p:spPr>
+          <a:xfrm>
+            <a:off x="4185666" y="4388224"/>
+            <a:ext cx="1014984" cy="182880"/>
+          </a:xfrm>
+          <a:prstGeom prst="rect">
+            <a:avLst/>
+          </a:prstGeom>
+          <a:noFill/>
+          <a:ln/>
+        </p:spPr>
+        <p:txBody>
+          <a:bodyPr wrap="square" lIns="0" tIns="0" rIns="0" bIns="0" rtlCol="0" anchor="ctr"/>
+          <a:lstStyle/>
+          <a:p>
+            <a:pPr indent="0" marL="0">
+              <a:buNone/>
+            </a:pPr>
+            <a:r>
+              <a:rPr lang="en-US" sz="550" i="1" dirty="0">
+                <a:solidFill>
+                  <a:srgbClr val="5E6980"/>
+                </a:solidFill>
+                <a:latin typeface="Calibri" pitchFamily="34" charset="0"/>
+                <a:ea typeface="Calibri" pitchFamily="34" charset="-122"/>
+                <a:cs typeface="Calibri" pitchFamily="34" charset="-120"/>
+              </a:rPr>
+              <a:t>Ask anything</a:t>
+            </a:r>
+            <a:endParaRPr lang="en-US" sz="550" dirty="0"/>
+          </a:p>
+        </p:txBody>
+      </p:sp>
+      <p:sp>
+        <p:nvSpPr>
+          <p:cNvPr id="41" name="Shape 39"/>
+          <p:cNvSpPr/>
+          <p:nvPr/>
+        </p:nvSpPr>
+        <p:spPr>
+          <a:xfrm>
+            <a:off x="3387852" y="4895716"/>
+            <a:ext cx="1298448" cy="256032"/>
+          </a:xfrm>
+          <a:prstGeom prst="roundRect">
+            <a:avLst>
+              <a:gd name="adj" fmla="val 50000"/>
+            </a:avLst>
+          </a:prstGeom>
+          <a:solidFill>
+            <a:srgbClr val="2E4571"/>
+          </a:solidFill>
+          <a:ln w="12700">
+            <a:solidFill>
+              <a:srgbClr val="333333"/>
+            </a:solidFill>
+            <a:prstDash val="solid"/>
+          </a:ln>
+        </p:spPr>
+      </p:sp>
+      <p:sp>
+        <p:nvSpPr>
+          <p:cNvPr id="42" name="Text 40"/>
+          <p:cNvSpPr/>
+          <p:nvPr/>
+        </p:nvSpPr>
+        <p:spPr>
+          <a:xfrm>
+            <a:off x="3387852" y="4895716"/>
+            <a:ext cx="1298448" cy="256032"/>
+          </a:xfrm>
+          <a:prstGeom prst="rect">
+            <a:avLst/>
+          </a:prstGeom>
+          <a:noFill/>
+          <a:ln/>
+        </p:spPr>
+        <p:txBody>
+          <a:bodyPr wrap="square" lIns="0" tIns="0" rIns="0" bIns="0" rtlCol="0" anchor="ctr"/>
+          <a:lstStyle/>
+          <a:p>
+            <a:pPr algn="ctr" indent="0" marL="0">
+              <a:buNone/>
+            </a:pPr>
+            <a:r>
+              <a:rPr lang="en-US" sz="900" b="1" dirty="0">
+                <a:solidFill>
+                  <a:srgbClr val="FFFFFF"/>
+                </a:solidFill>
+                <a:latin typeface="Calibri" pitchFamily="34" charset="0"/>
+                <a:ea typeface="Calibri" pitchFamily="34" charset="-122"/>
+                <a:cs typeface="Calibri" pitchFamily="34" charset="-120"/>
+              </a:rPr>
+              <a:t>Conversational</a:t>
+            </a:r>
+            <a:endParaRPr lang="en-US" sz="900" dirty="0"/>
+          </a:p>
+        </p:txBody>
+      </p:sp>
+      <p:sp>
+        <p:nvSpPr>
+          <p:cNvPr id="43" name="Text 41"/>
+          <p:cNvSpPr/>
+          <p:nvPr/>
+        </p:nvSpPr>
+        <p:spPr>
+          <a:xfrm>
+            <a:off x="4759452" y="4895716"/>
+            <a:ext cx="1220724" cy="256032"/>
+          </a:xfrm>
+          <a:prstGeom prst="rect">
+            <a:avLst/>
+          </a:prstGeom>
+          <a:noFill/>
+          <a:ln/>
+        </p:spPr>
+        <p:txBody>
+          <a:bodyPr wrap="square" lIns="0" tIns="0" rIns="0" bIns="0" rtlCol="0" anchor="ctr"/>
+          <a:lstStyle/>
+          <a:p>
+            <a:pPr indent="0" marL="0">
+              <a:buNone/>
+            </a:pPr>
+            <a:r>
+              <a:rPr lang="en-US" sz="900" b="1" dirty="0">
+                <a:solidFill>
+                  <a:srgbClr val="5E6980"/>
+                </a:solidFill>
+                <a:latin typeface="Calibri" pitchFamily="34" charset="0"/>
+                <a:ea typeface="Calibri" pitchFamily="34" charset="-122"/>
+                <a:cs typeface="Calibri" pitchFamily="34" charset="-120"/>
+              </a:rPr>
+              <a:t>Shift 1</a:t>
+            </a:r>
+            <a:endParaRPr lang="en-US" sz="900" dirty="0"/>
+          </a:p>
+        </p:txBody>
+      </p:sp>
+      <p:sp>
+        <p:nvSpPr>
+          <p:cNvPr id="44" name="Text 42"/>
+          <p:cNvSpPr/>
+          <p:nvPr/>
+        </p:nvSpPr>
+        <p:spPr>
+          <a:xfrm>
+            <a:off x="3387852" y="5188324"/>
+            <a:ext cx="2592324" cy="365760"/>
+          </a:xfrm>
+          <a:prstGeom prst="rect">
+            <a:avLst/>
+          </a:prstGeom>
+          <a:noFill/>
+          <a:ln/>
+        </p:spPr>
+        <p:txBody>
+          <a:bodyPr wrap="square" lIns="0" tIns="0" rIns="0" bIns="0" rtlCol="0" anchor="t"/>
+          <a:lstStyle/>
+          <a:p>
+            <a:pPr indent="0" marL="0">
+              <a:lnSpc>
+                <a:spcPts val="1700"/>
+              </a:lnSpc>
+              <a:buNone/>
+            </a:pPr>
+            <a:r>
+              <a:rPr lang="en-US" sz="1400" b="1" dirty="0">
+                <a:solidFill>
+                  <a:srgbClr val="16233B"/>
+                </a:solidFill>
+                <a:latin typeface="Cambria" pitchFamily="34" charset="0"/>
+                <a:ea typeface="Cambria" pitchFamily="34" charset="-122"/>
+                <a:cs typeface="Cambria" pitchFamily="34" charset="-120"/>
+              </a:rPr>
+              <a:t>Zero-tenure vocabulary</a:t>
+            </a:r>
+            <a:endParaRPr lang="en-US" sz="1400" dirty="0"/>
+          </a:p>
+        </p:txBody>
+      </p:sp>
+      <p:sp>
+        <p:nvSpPr>
+          <p:cNvPr id="45" name="Shape 43"/>
+          <p:cNvSpPr/>
+          <p:nvPr/>
+        </p:nvSpPr>
+        <p:spPr>
+          <a:xfrm>
+            <a:off x="6809994" y="1901952"/>
+            <a:ext cx="1389888" cy="2865748"/>
+          </a:xfrm>
+          <a:prstGeom prst="roundRect">
+            <a:avLst>
+              <a:gd name="adj" fmla="val 9211"/>
+            </a:avLst>
+          </a:prstGeom>
+          <a:solidFill>
+            <a:srgbClr val="16233B"/>
+          </a:solidFill>
+          <a:ln w="12700">
+            <a:solidFill>
+              <a:srgbClr val="2E4571"/>
+            </a:solidFill>
+            <a:prstDash val="solid"/>
+          </a:ln>
+        </p:spPr>
+      </p:sp>
+      <p:sp>
+        <p:nvSpPr>
+          <p:cNvPr id="46" name="Shape 44"/>
+          <p:cNvSpPr/>
+          <p:nvPr/>
+        </p:nvSpPr>
+        <p:spPr>
+          <a:xfrm>
+            <a:off x="6860286" y="1952244"/>
+            <a:ext cx="1289304" cy="2765164"/>
+          </a:xfrm>
+          <a:prstGeom prst="roundRect">
+            <a:avLst>
+              <a:gd name="adj" fmla="val 7092"/>
+            </a:avLst>
+          </a:prstGeom>
+          <a:solidFill>
+            <a:srgbClr val="FFFFFF"/>
+          </a:solidFill>
+          <a:ln w="12700">
+            <a:solidFill>
+              <a:srgbClr val="333333"/>
+            </a:solidFill>
+            <a:prstDash val="solid"/>
+          </a:ln>
+        </p:spPr>
+      </p:sp>
+      <p:sp>
+        <p:nvSpPr>
+          <p:cNvPr id="47" name="Shape 45"/>
+          <p:cNvSpPr/>
+          <p:nvPr/>
+        </p:nvSpPr>
+        <p:spPr>
+          <a:xfrm>
+            <a:off x="7303770" y="1963217"/>
+            <a:ext cx="402336" cy="68580"/>
+          </a:xfrm>
+          <a:prstGeom prst="roundRect">
+            <a:avLst>
+              <a:gd name="adj" fmla="val 49333"/>
+            </a:avLst>
+          </a:prstGeom>
+          <a:solidFill>
+            <a:srgbClr val="16233B"/>
+          </a:solidFill>
+          <a:ln w="12700">
+            <a:solidFill>
+              <a:srgbClr val="333333"/>
+            </a:solidFill>
+            <a:prstDash val="solid"/>
+          </a:ln>
+        </p:spPr>
+      </p:sp>
+      <p:sp>
+        <p:nvSpPr>
+          <p:cNvPr id="48" name="Shape 46"/>
+          <p:cNvSpPr/>
+          <p:nvPr/>
+        </p:nvSpPr>
+        <p:spPr>
+          <a:xfrm>
+            <a:off x="7285482" y="4644256"/>
+            <a:ext cx="438912" cy="25603"/>
+          </a:xfrm>
+          <a:prstGeom prst="roundRect">
+            <a:avLst>
+              <a:gd name="adj" fmla="val 50000"/>
+            </a:avLst>
+          </a:prstGeom>
+          <a:solidFill>
+            <a:srgbClr val="C6CFDD"/>
+          </a:solidFill>
+          <a:ln w="12700">
+            <a:solidFill>
+              <a:srgbClr val="333333"/>
+            </a:solidFill>
+            <a:prstDash val="solid"/>
+          </a:ln>
+        </p:spPr>
+      </p:sp>
+      <p:sp>
+        <p:nvSpPr>
+          <p:cNvPr id="49" name="Text 47"/>
+          <p:cNvSpPr/>
+          <p:nvPr/>
+        </p:nvSpPr>
+        <p:spPr>
+          <a:xfrm>
+            <a:off x="6951726" y="1965960"/>
+            <a:ext cx="1106424" cy="146304"/>
+          </a:xfrm>
+          <a:prstGeom prst="rect">
+            <a:avLst/>
+          </a:prstGeom>
+          <a:noFill/>
+          <a:ln/>
+        </p:spPr>
+        <p:txBody>
+          <a:bodyPr wrap="square" lIns="0" tIns="0" rIns="0" bIns="0" rtlCol="0" anchor="ctr"/>
+          <a:lstStyle/>
+          <a:p>
+            <a:pPr indent="0" marL="0">
+              <a:buNone/>
+            </a:pPr>
+            <a:r>
+              <a:rPr lang="en-US" sz="600" b="1" dirty="0">
+                <a:solidFill>
+                  <a:srgbClr val="1B2338"/>
+                </a:solidFill>
+                <a:latin typeface="Calibri" pitchFamily="34" charset="0"/>
+                <a:ea typeface="Calibri" pitchFamily="34" charset="-122"/>
+                <a:cs typeface="Calibri" pitchFamily="34" charset="-120"/>
+              </a:rPr>
+              <a:t>18:02</a:t>
+            </a:r>
+            <a:endParaRPr lang="en-US" sz="600" dirty="0"/>
+          </a:p>
+        </p:txBody>
+      </p:sp>
+      <p:sp>
+        <p:nvSpPr>
+          <p:cNvPr id="50" name="Text 48"/>
+          <p:cNvSpPr/>
+          <p:nvPr/>
+        </p:nvSpPr>
+        <p:spPr>
+          <a:xfrm>
+            <a:off x="6951726" y="1965960"/>
+            <a:ext cx="1106424" cy="146304"/>
+          </a:xfrm>
+          <a:prstGeom prst="rect">
+            <a:avLst/>
+          </a:prstGeom>
+          <a:noFill/>
+          <a:ln/>
+        </p:spPr>
+        <p:txBody>
+          <a:bodyPr wrap="square" lIns="0" tIns="0" rIns="0" bIns="0" rtlCol="0" anchor="ctr"/>
+          <a:lstStyle/>
+          <a:p>
+            <a:pPr algn="r" indent="0" marL="0">
+              <a:buNone/>
+            </a:pPr>
+            <a:r>
+              <a:rPr lang="en-US" sz="500" dirty="0">
+                <a:solidFill>
+                  <a:srgbClr val="5E6980"/>
+                </a:solidFill>
+                <a:latin typeface="Calibri" pitchFamily="34" charset="0"/>
+                <a:ea typeface="Calibri" pitchFamily="34" charset="-122"/>
+                <a:cs typeface="Calibri" pitchFamily="34" charset="-120"/>
+              </a:rPr>
+              <a:t>▮▮▮</a:t>
+            </a:r>
+            <a:endParaRPr lang="en-US" sz="500" dirty="0"/>
+          </a:p>
+        </p:txBody>
+      </p:sp>
+      <p:sp>
+        <p:nvSpPr>
+          <p:cNvPr id="51" name="Shape 49"/>
+          <p:cNvSpPr/>
+          <p:nvPr/>
+        </p:nvSpPr>
+        <p:spPr>
+          <a:xfrm>
+            <a:off x="6860286" y="2135124"/>
+            <a:ext cx="1289304" cy="219456"/>
+          </a:xfrm>
+          <a:prstGeom prst="rect">
+            <a:avLst/>
+          </a:prstGeom>
+          <a:solidFill>
             <a:srgbClr val="D9922B"/>
+          </a:solidFill>
+          <a:ln w="12700">
+            <a:solidFill>
+              <a:srgbClr val="333333"/>
+            </a:solidFill>
+            <a:prstDash val="solid"/>
+          </a:ln>
+        </p:spPr>
+      </p:sp>
+      <p:sp>
+        <p:nvSpPr>
+          <p:cNvPr id="52" name="Text 50"/>
+          <p:cNvSpPr/>
+          <p:nvPr/>
+        </p:nvSpPr>
+        <p:spPr>
+          <a:xfrm>
+            <a:off x="6951726" y="2135124"/>
+            <a:ext cx="1106424" cy="219456"/>
+          </a:xfrm>
+          <a:prstGeom prst="rect">
+            <a:avLst/>
+          </a:prstGeom>
+          <a:noFill/>
+          <a:ln/>
+        </p:spPr>
+        <p:txBody>
+          <a:bodyPr wrap="square" lIns="0" tIns="0" rIns="0" bIns="0" rtlCol="0" anchor="ctr"/>
+          <a:lstStyle/>
+          <a:p>
+            <a:pPr indent="0" marL="0">
+              <a:buNone/>
+            </a:pPr>
+            <a:r>
+              <a:rPr lang="en-US" sz="650" b="1" dirty="0">
+                <a:solidFill>
+                  <a:srgbClr val="FFFFFF"/>
+                </a:solidFill>
+                <a:latin typeface="Calibri" pitchFamily="34" charset="0"/>
+                <a:ea typeface="Calibri" pitchFamily="34" charset="-122"/>
+                <a:cs typeface="Calibri" pitchFamily="34" charset="-120"/>
+              </a:rPr>
+              <a:t>You earned a pick</a:t>
+            </a:r>
+            <a:endParaRPr lang="en-US" sz="650" dirty="0"/>
+          </a:p>
+        </p:txBody>
+      </p:sp>
+      <p:sp>
+        <p:nvSpPr>
+          <p:cNvPr id="53" name="Text 51"/>
+          <p:cNvSpPr/>
+          <p:nvPr/>
+        </p:nvSpPr>
+        <p:spPr>
+          <a:xfrm>
+            <a:off x="6951726" y="2409444"/>
+            <a:ext cx="1106424" cy="146304"/>
+          </a:xfrm>
+          <a:prstGeom prst="rect">
+            <a:avLst/>
+          </a:prstGeom>
+          <a:noFill/>
+          <a:ln/>
+        </p:spPr>
+        <p:txBody>
+          <a:bodyPr wrap="square" lIns="0" tIns="0" rIns="0" bIns="0" rtlCol="0" anchor="ctr"/>
+          <a:lstStyle/>
+          <a:p>
+            <a:pPr indent="0" marL="0">
+              <a:buNone/>
+            </a:pPr>
+            <a:r>
+              <a:rPr lang="en-US" sz="600" dirty="0">
+                <a:solidFill>
+                  <a:srgbClr val="5E6980"/>
+                </a:solidFill>
+                <a:latin typeface="Calibri" pitchFamily="34" charset="0"/>
+                <a:ea typeface="Calibri" pitchFamily="34" charset="-122"/>
+                <a:cs typeface="Calibri" pitchFamily="34" charset="-120"/>
+              </a:rPr>
+              <a:t>5 shifts. All trainings done.</a:t>
+            </a:r>
+            <a:endParaRPr lang="en-US" sz="600" dirty="0"/>
+          </a:p>
+        </p:txBody>
+      </p:sp>
+      <p:sp>
+        <p:nvSpPr>
+          <p:cNvPr id="54" name="Shape 52"/>
+          <p:cNvSpPr/>
+          <p:nvPr/>
+        </p:nvSpPr>
+        <p:spPr>
+          <a:xfrm>
+            <a:off x="6942582" y="2610612"/>
+            <a:ext cx="1124712" cy="256032"/>
+          </a:xfrm>
+          <a:prstGeom prst="roundRect">
+            <a:avLst>
+              <a:gd name="adj" fmla="val 21429"/>
+            </a:avLst>
+          </a:prstGeom>
+          <a:solidFill>
+            <a:srgbClr val="FAECD4"/>
           </a:solidFill>
           <a:ln w="12700">
             <a:solidFill>
@@ -37231,14 +38463,39 @@
       </p:sp>
       <p:sp>
         <p:nvSpPr>
-          <p:cNvPr id="19" name="Text 17"/>
-          <p:cNvSpPr/>
-          <p:nvPr/>
-        </p:nvSpPr>
-        <p:spPr>
-          <a:xfrm>
-            <a:off x="6373368" y="2103120"/>
-            <a:ext cx="1298448" cy="274320"/>
+          <p:cNvPr id="55" name="Shape 53"/>
+          <p:cNvSpPr/>
+          <p:nvPr/>
+        </p:nvSpPr>
+        <p:spPr>
+          <a:xfrm>
+            <a:off x="7015734" y="2697480"/>
+            <a:ext cx="82296" cy="82296"/>
+          </a:xfrm>
+          <a:prstGeom prst="ellipse">
+            <a:avLst/>
+          </a:prstGeom>
+          <a:solidFill>
+            <a:srgbClr val="D9922B"/>
+          </a:solidFill>
+          <a:ln w="9525">
+            <a:solidFill>
+              <a:srgbClr val="D9922B"/>
+            </a:solidFill>
+            <a:prstDash val="solid"/>
+          </a:ln>
+        </p:spPr>
+      </p:sp>
+      <p:sp>
+        <p:nvSpPr>
+          <p:cNvPr id="56" name="Text 54"/>
+          <p:cNvSpPr/>
+          <p:nvPr/>
+        </p:nvSpPr>
+        <p:spPr>
+          <a:xfrm>
+            <a:off x="7143750" y="2610612"/>
+            <a:ext cx="923544" cy="256032"/>
           </a:xfrm>
           <a:prstGeom prst="rect">
             <a:avLst/>
@@ -37250,34 +38507,86 @@
           <a:bodyPr wrap="square" lIns="0" tIns="0" rIns="0" bIns="0" rtlCol="0" anchor="ctr"/>
           <a:lstStyle/>
           <a:p>
-            <a:pPr algn="ctr" indent="0" marL="0">
-              <a:buNone/>
-            </a:pPr>
-            <a:r>
-              <a:rPr lang="en-US" sz="950" b="1" dirty="0">
-                <a:solidFill>
-                  <a:srgbClr val="FFFFFF"/>
+            <a:pPr indent="0" marL="0">
+              <a:buNone/>
+            </a:pPr>
+            <a:r>
+              <a:rPr lang="en-US" sz="600" dirty="0">
+                <a:solidFill>
+                  <a:srgbClr val="1B2338"/>
                 </a:solidFill>
                 <a:latin typeface="Calibri" pitchFamily="34" charset="0"/>
                 <a:ea typeface="Calibri" pitchFamily="34" charset="-122"/>
                 <a:cs typeface="Calibri" pitchFamily="34" charset="-120"/>
               </a:rPr>
-              <a:t>Reward</a:t>
-            </a:r>
-            <a:endParaRPr lang="en-US" sz="950" dirty="0"/>
-          </a:p>
-        </p:txBody>
-      </p:sp>
-      <p:sp>
-        <p:nvSpPr>
-          <p:cNvPr id="20" name="Text 18"/>
-          <p:cNvSpPr/>
-          <p:nvPr/>
-        </p:nvSpPr>
-        <p:spPr>
-          <a:xfrm>
-            <a:off x="6373368" y="2487168"/>
-            <a:ext cx="2263140" cy="256032"/>
+              <a:t>$15 gift card</a:t>
+            </a:r>
+            <a:endParaRPr lang="en-US" sz="600" dirty="0"/>
+          </a:p>
+        </p:txBody>
+      </p:sp>
+      <p:sp>
+        <p:nvSpPr>
+          <p:cNvPr id="57" name="Shape 55"/>
+          <p:cNvSpPr/>
+          <p:nvPr/>
+        </p:nvSpPr>
+        <p:spPr>
+          <a:xfrm>
+            <a:off x="6942582" y="2921508"/>
+            <a:ext cx="1124712" cy="256032"/>
+          </a:xfrm>
+          <a:prstGeom prst="roundRect">
+            <a:avLst>
+              <a:gd name="adj" fmla="val 21429"/>
+            </a:avLst>
+          </a:prstGeom>
+          <a:solidFill>
+            <a:srgbClr val="F1F5FA"/>
+          </a:solidFill>
+          <a:ln w="9525">
+            <a:solidFill>
+              <a:srgbClr val="E2EAF4"/>
+            </a:solidFill>
+            <a:prstDash val="solid"/>
+          </a:ln>
+        </p:spPr>
+      </p:sp>
+      <p:sp>
+        <p:nvSpPr>
+          <p:cNvPr id="58" name="Shape 56"/>
+          <p:cNvSpPr/>
+          <p:nvPr/>
+        </p:nvSpPr>
+        <p:spPr>
+          <a:xfrm>
+            <a:off x="7015734" y="3008376"/>
+            <a:ext cx="82296" cy="82296"/>
+          </a:xfrm>
+          <a:prstGeom prst="ellipse">
+            <a:avLst/>
+          </a:prstGeom>
+          <a:solidFill>
+            <a:srgbClr val="FFFFFF"/>
+          </a:solidFill>
+          <a:ln w="9525">
+            <a:solidFill>
+              <a:srgbClr val="C6CFDD"/>
+            </a:solidFill>
+            <a:prstDash val="solid"/>
+          </a:ln>
+        </p:spPr>
+      </p:sp>
+      <p:sp>
+        <p:nvSpPr>
+          <p:cNvPr id="59" name="Text 57"/>
+          <p:cNvSpPr/>
+          <p:nvPr/>
+        </p:nvSpPr>
+        <p:spPr>
+          <a:xfrm>
+            <a:off x="7143750" y="2921508"/>
+            <a:ext cx="923544" cy="256032"/>
           </a:xfrm>
           <a:prstGeom prst="rect">
             <a:avLst/>
@@ -37293,91 +38602,98 @@
               <a:buNone/>
             </a:pPr>
             <a:r>
-              <a:rPr lang="en-US" sz="1050" b="1" dirty="0">
-                <a:solidFill>
-                  <a:srgbClr val="5E6980"/>
+              <a:rPr lang="en-US" sz="600" dirty="0">
+                <a:solidFill>
+                  <a:srgbClr val="1B2338"/>
                 </a:solidFill>
                 <a:latin typeface="Calibri" pitchFamily="34" charset="0"/>
                 <a:ea typeface="Calibri" pitchFamily="34" charset="-122"/>
                 <a:cs typeface="Calibri" pitchFamily="34" charset="-120"/>
               </a:rPr>
-              <a:t>Week 1</a:t>
-            </a:r>
-            <a:endParaRPr lang="en-US" sz="1050" dirty="0"/>
-          </a:p>
-        </p:txBody>
-      </p:sp>
-      <p:sp>
-        <p:nvSpPr>
-          <p:cNvPr id="21" name="Text 19"/>
-          <p:cNvSpPr/>
-          <p:nvPr/>
-        </p:nvSpPr>
-        <p:spPr>
-          <a:xfrm>
-            <a:off x="6373368" y="2761488"/>
-            <a:ext cx="2263140" cy="603504"/>
-          </a:xfrm>
-          <a:prstGeom prst="rect">
-            <a:avLst/>
-          </a:prstGeom>
-          <a:noFill/>
-          <a:ln/>
-        </p:spPr>
-        <p:txBody>
-          <a:bodyPr wrap="square" lIns="0" tIns="0" rIns="0" bIns="0" rtlCol="0" anchor="t"/>
+              <a:t>Free lunch on shift</a:t>
+            </a:r>
+            <a:endParaRPr lang="en-US" sz="600" dirty="0"/>
+          </a:p>
+        </p:txBody>
+      </p:sp>
+      <p:sp>
+        <p:nvSpPr>
+          <p:cNvPr id="60" name="Shape 58"/>
+          <p:cNvSpPr/>
+          <p:nvPr/>
+        </p:nvSpPr>
+        <p:spPr>
+          <a:xfrm>
+            <a:off x="6942582" y="3232404"/>
+            <a:ext cx="1124712" cy="256032"/>
+          </a:xfrm>
+          <a:prstGeom prst="roundRect">
+            <a:avLst>
+              <a:gd name="adj" fmla="val 21429"/>
+            </a:avLst>
+          </a:prstGeom>
+          <a:solidFill>
+            <a:srgbClr val="F1F5FA"/>
+          </a:solidFill>
+          <a:ln w="9525">
+            <a:solidFill>
+              <a:srgbClr val="E2EAF4"/>
+            </a:solidFill>
+            <a:prstDash val="solid"/>
+          </a:ln>
+        </p:spPr>
+      </p:sp>
+      <p:sp>
+        <p:nvSpPr>
+          <p:cNvPr id="61" name="Shape 59"/>
+          <p:cNvSpPr/>
+          <p:nvPr/>
+        </p:nvSpPr>
+        <p:spPr>
+          <a:xfrm>
+            <a:off x="7015734" y="3319272"/>
+            <a:ext cx="82296" cy="82296"/>
+          </a:xfrm>
+          <a:prstGeom prst="ellipse">
+            <a:avLst/>
+          </a:prstGeom>
+          <a:solidFill>
+            <a:srgbClr val="FFFFFF"/>
+          </a:solidFill>
+          <a:ln w="9525">
+            <a:solidFill>
+              <a:srgbClr val="C6CFDD"/>
+            </a:solidFill>
+            <a:prstDash val="solid"/>
+          </a:ln>
+        </p:spPr>
+      </p:sp>
+      <p:sp>
+        <p:nvSpPr>
+          <p:cNvPr id="62" name="Text 60"/>
+          <p:cNvSpPr/>
+          <p:nvPr/>
+        </p:nvSpPr>
+        <p:spPr>
+          <a:xfrm>
+            <a:off x="7143750" y="3232404"/>
+            <a:ext cx="923544" cy="256032"/>
+          </a:xfrm>
+          <a:prstGeom prst="rect">
+            <a:avLst/>
+          </a:prstGeom>
+          <a:noFill/>
+          <a:ln/>
+        </p:spPr>
+        <p:txBody>
+          <a:bodyPr wrap="square" lIns="0" tIns="0" rIns="0" bIns="0" rtlCol="0" anchor="ctr"/>
           <a:lstStyle/>
           <a:p>
             <a:pPr indent="0" marL="0">
-              <a:lnSpc>
-                <a:spcPts val="1900"/>
-              </a:lnSpc>
-              <a:buNone/>
-            </a:pPr>
-            <a:r>
-              <a:rPr lang="en-US" sz="1550" b="1" dirty="0">
-                <a:solidFill>
-                  <a:srgbClr val="8A5A11"/>
-                </a:solidFill>
-                <a:latin typeface="Cambria" pitchFamily="34" charset="0"/>
-                <a:ea typeface="Cambria" pitchFamily="34" charset="-122"/>
-                <a:cs typeface="Cambria" pitchFamily="34" charset="-120"/>
-              </a:rPr>
-              <a:t>Real reward, her choice</a:t>
-            </a:r>
-            <a:endParaRPr lang="en-US" sz="1550" dirty="0"/>
-          </a:p>
-        </p:txBody>
-      </p:sp>
-      <p:sp>
-        <p:nvSpPr>
-          <p:cNvPr id="22" name="Text 20"/>
-          <p:cNvSpPr/>
-          <p:nvPr/>
-        </p:nvSpPr>
-        <p:spPr>
-          <a:xfrm>
-            <a:off x="6373368" y="3401568"/>
-            <a:ext cx="2263140" cy="1280160"/>
-          </a:xfrm>
-          <a:prstGeom prst="rect">
-            <a:avLst/>
-          </a:prstGeom>
-          <a:noFill/>
-          <a:ln/>
-        </p:spPr>
-        <p:txBody>
-          <a:bodyPr wrap="square" lIns="0" tIns="0" rIns="0" bIns="0" rtlCol="0" anchor="t"/>
-          <a:lstStyle/>
-          <a:p>
-            <a:pPr indent="0" marL="0">
-              <a:lnSpc>
-                <a:spcPts val="1600"/>
-              </a:lnSpc>
-              <a:buNone/>
-            </a:pPr>
-            <a:r>
-              <a:rPr lang="en-US" sz="1200" dirty="0">
+              <a:buNone/>
+            </a:pPr>
+            <a:r>
+              <a:rPr lang="en-US" sz="600" dirty="0">
                 <a:solidFill>
                   <a:srgbClr val="1B2338"/>
                 </a:solidFill>
@@ -37385,34 +38701,125 @@
                 <a:ea typeface="Calibri" pitchFamily="34" charset="-122"/>
                 <a:cs typeface="Calibri" pitchFamily="34" charset="-120"/>
               </a:rPr>
-              <a:t>Five shifts, all trainings done. Pick one: $15 gift card, free lunch, 5 stock-sweepstake entries, or $15 to a cause you choose.</a:t>
-            </a:r>
-            <a:endParaRPr lang="en-US" sz="1200" dirty="0"/>
-          </a:p>
-        </p:txBody>
-      </p:sp>
-      <p:sp>
-        <p:nvSpPr>
-          <p:cNvPr id="23" name="Shape 21"/>
-          <p:cNvSpPr/>
-          <p:nvPr/>
-        </p:nvSpPr>
-        <p:spPr>
-          <a:xfrm>
-            <a:off x="9029700" y="1920240"/>
-            <a:ext cx="2592324" cy="2926080"/>
+              <a:t>5 stock-sweepstake entries</a:t>
+            </a:r>
+            <a:endParaRPr lang="en-US" sz="600" dirty="0"/>
+          </a:p>
+        </p:txBody>
+      </p:sp>
+      <p:sp>
+        <p:nvSpPr>
+          <p:cNvPr id="63" name="Shape 61"/>
+          <p:cNvSpPr/>
+          <p:nvPr/>
+        </p:nvSpPr>
+        <p:spPr>
+          <a:xfrm>
+            <a:off x="6942582" y="3543300"/>
+            <a:ext cx="1124712" cy="256032"/>
           </a:xfrm>
           <a:prstGeom prst="roundRect">
             <a:avLst>
-              <a:gd name="adj" fmla="val 4233"/>
+              <a:gd name="adj" fmla="val 21429"/>
             </a:avLst>
           </a:prstGeom>
           <a:solidFill>
-            <a:srgbClr val="DDEAE1"/>
+            <a:srgbClr val="F1F5FA"/>
+          </a:solidFill>
+          <a:ln w="9525">
+            <a:solidFill>
+              <a:srgbClr val="E2EAF4"/>
+            </a:solidFill>
+            <a:prstDash val="solid"/>
+          </a:ln>
+        </p:spPr>
+      </p:sp>
+      <p:sp>
+        <p:nvSpPr>
+          <p:cNvPr id="64" name="Shape 62"/>
+          <p:cNvSpPr/>
+          <p:nvPr/>
+        </p:nvSpPr>
+        <p:spPr>
+          <a:xfrm>
+            <a:off x="7015734" y="3630168"/>
+            <a:ext cx="82296" cy="82296"/>
+          </a:xfrm>
+          <a:prstGeom prst="ellipse">
+            <a:avLst/>
+          </a:prstGeom>
+          <a:solidFill>
+            <a:srgbClr val="FFFFFF"/>
+          </a:solidFill>
+          <a:ln w="9525">
+            <a:solidFill>
+              <a:srgbClr val="C6CFDD"/>
+            </a:solidFill>
+            <a:prstDash val="solid"/>
+          </a:ln>
+        </p:spPr>
+      </p:sp>
+      <p:sp>
+        <p:nvSpPr>
+          <p:cNvPr id="65" name="Text 63"/>
+          <p:cNvSpPr/>
+          <p:nvPr/>
+        </p:nvSpPr>
+        <p:spPr>
+          <a:xfrm>
+            <a:off x="7143750" y="3543300"/>
+            <a:ext cx="923544" cy="256032"/>
+          </a:xfrm>
+          <a:prstGeom prst="rect">
+            <a:avLst/>
+          </a:prstGeom>
+          <a:noFill/>
+          <a:ln/>
+        </p:spPr>
+        <p:txBody>
+          <a:bodyPr wrap="square" lIns="0" tIns="0" rIns="0" bIns="0" rtlCol="0" anchor="ctr"/>
+          <a:lstStyle/>
+          <a:p>
+            <a:pPr indent="0" marL="0">
+              <a:buNone/>
+            </a:pPr>
+            <a:r>
+              <a:rPr lang="en-US" sz="600" dirty="0">
+                <a:solidFill>
+                  <a:srgbClr val="1B2338"/>
+                </a:solidFill>
+                <a:latin typeface="Calibri" pitchFamily="34" charset="0"/>
+                <a:ea typeface="Calibri" pitchFamily="34" charset="-122"/>
+                <a:cs typeface="Calibri" pitchFamily="34" charset="-120"/>
+              </a:rPr>
+              <a:t>$15 to a cause you pick</a:t>
+            </a:r>
+            <a:endParaRPr lang="en-US" sz="600" dirty="0"/>
+          </a:p>
+        </p:txBody>
+      </p:sp>
+      <p:sp>
+        <p:nvSpPr>
+          <p:cNvPr id="66" name="Shape 64"/>
+          <p:cNvSpPr/>
+          <p:nvPr/>
+        </p:nvSpPr>
+        <p:spPr>
+          <a:xfrm>
+            <a:off x="6942582" y="4333360"/>
+            <a:ext cx="1124712" cy="237744"/>
+          </a:xfrm>
+          <a:prstGeom prst="roundRect">
+            <a:avLst>
+              <a:gd name="adj" fmla="val 23077"/>
+            </a:avLst>
+          </a:prstGeom>
+          <a:solidFill>
+            <a:srgbClr val="D9922B"/>
           </a:solidFill>
           <a:ln w="12700">
             <a:solidFill>
-              <a:srgbClr val="DDEAE1"/>
+              <a:srgbClr val="333333"/>
             </a:solidFill>
             <a:prstDash val="solid"/>
           </a:ln>
@@ -37420,19 +38827,478 @@
       </p:sp>
       <p:sp>
         <p:nvSpPr>
-          <p:cNvPr id="24" name="Shape 22"/>
-          <p:cNvSpPr/>
-          <p:nvPr/>
-        </p:nvSpPr>
-        <p:spPr>
-          <a:xfrm>
-            <a:off x="9194292" y="2103120"/>
-            <a:ext cx="1298448" cy="274320"/>
+          <p:cNvPr id="67" name="Text 65"/>
+          <p:cNvSpPr/>
+          <p:nvPr/>
+        </p:nvSpPr>
+        <p:spPr>
+          <a:xfrm>
+            <a:off x="6942582" y="4333360"/>
+            <a:ext cx="1124712" cy="237744"/>
+          </a:xfrm>
+          <a:prstGeom prst="rect">
+            <a:avLst/>
+          </a:prstGeom>
+          <a:noFill/>
+          <a:ln/>
+        </p:spPr>
+        <p:txBody>
+          <a:bodyPr wrap="square" lIns="0" tIns="0" rIns="0" bIns="0" rtlCol="0" anchor="ctr"/>
+          <a:lstStyle/>
+          <a:p>
+            <a:pPr algn="ctr" indent="0" marL="0">
+              <a:buNone/>
+            </a:pPr>
+            <a:r>
+              <a:rPr lang="en-US" sz="650" b="1" dirty="0">
+                <a:solidFill>
+                  <a:srgbClr val="FFFFFF"/>
+                </a:solidFill>
+                <a:latin typeface="Calibri" pitchFamily="34" charset="0"/>
+                <a:ea typeface="Calibri" pitchFamily="34" charset="-122"/>
+                <a:cs typeface="Calibri" pitchFamily="34" charset="-120"/>
+              </a:rPr>
+              <a:t>Claim it</a:t>
+            </a:r>
+            <a:endParaRPr lang="en-US" sz="650" dirty="0"/>
+          </a:p>
+        </p:txBody>
+      </p:sp>
+      <p:sp>
+        <p:nvSpPr>
+          <p:cNvPr id="68" name="Shape 66"/>
+          <p:cNvSpPr/>
+          <p:nvPr/>
+        </p:nvSpPr>
+        <p:spPr>
+          <a:xfrm>
+            <a:off x="6208776" y="4895716"/>
+            <a:ext cx="1298448" cy="256032"/>
           </a:xfrm>
           <a:prstGeom prst="roundRect">
             <a:avLst>
               <a:gd name="adj" fmla="val 50000"/>
             </a:avLst>
+          </a:prstGeom>
+          <a:solidFill>
+            <a:srgbClr val="D9922B"/>
+          </a:solidFill>
+          <a:ln w="12700">
+            <a:solidFill>
+              <a:srgbClr val="333333"/>
+            </a:solidFill>
+            <a:prstDash val="solid"/>
+          </a:ln>
+        </p:spPr>
+      </p:sp>
+      <p:sp>
+        <p:nvSpPr>
+          <p:cNvPr id="69" name="Text 67"/>
+          <p:cNvSpPr/>
+          <p:nvPr/>
+        </p:nvSpPr>
+        <p:spPr>
+          <a:xfrm>
+            <a:off x="6208776" y="4895716"/>
+            <a:ext cx="1298448" cy="256032"/>
+          </a:xfrm>
+          <a:prstGeom prst="rect">
+            <a:avLst/>
+          </a:prstGeom>
+          <a:noFill/>
+          <a:ln/>
+        </p:spPr>
+        <p:txBody>
+          <a:bodyPr wrap="square" lIns="0" tIns="0" rIns="0" bIns="0" rtlCol="0" anchor="ctr"/>
+          <a:lstStyle/>
+          <a:p>
+            <a:pPr algn="ctr" indent="0" marL="0">
+              <a:buNone/>
+            </a:pPr>
+            <a:r>
+              <a:rPr lang="en-US" sz="900" b="1" dirty="0">
+                <a:solidFill>
+                  <a:srgbClr val="FFFFFF"/>
+                </a:solidFill>
+                <a:latin typeface="Calibri" pitchFamily="34" charset="0"/>
+                <a:ea typeface="Calibri" pitchFamily="34" charset="-122"/>
+                <a:cs typeface="Calibri" pitchFamily="34" charset="-120"/>
+              </a:rPr>
+              <a:t>Reward</a:t>
+            </a:r>
+            <a:endParaRPr lang="en-US" sz="900" dirty="0"/>
+          </a:p>
+        </p:txBody>
+      </p:sp>
+      <p:sp>
+        <p:nvSpPr>
+          <p:cNvPr id="70" name="Text 68"/>
+          <p:cNvSpPr/>
+          <p:nvPr/>
+        </p:nvSpPr>
+        <p:spPr>
+          <a:xfrm>
+            <a:off x="7580376" y="4895716"/>
+            <a:ext cx="1220724" cy="256032"/>
+          </a:xfrm>
+          <a:prstGeom prst="rect">
+            <a:avLst/>
+          </a:prstGeom>
+          <a:noFill/>
+          <a:ln/>
+        </p:spPr>
+        <p:txBody>
+          <a:bodyPr wrap="square" lIns="0" tIns="0" rIns="0" bIns="0" rtlCol="0" anchor="ctr"/>
+          <a:lstStyle/>
+          <a:p>
+            <a:pPr indent="0" marL="0">
+              <a:buNone/>
+            </a:pPr>
+            <a:r>
+              <a:rPr lang="en-US" sz="900" b="1" dirty="0">
+                <a:solidFill>
+                  <a:srgbClr val="5E6980"/>
+                </a:solidFill>
+                <a:latin typeface="Calibri" pitchFamily="34" charset="0"/>
+                <a:ea typeface="Calibri" pitchFamily="34" charset="-122"/>
+                <a:cs typeface="Calibri" pitchFamily="34" charset="-120"/>
+              </a:rPr>
+              <a:t>Week 1</a:t>
+            </a:r>
+            <a:endParaRPr lang="en-US" sz="900" dirty="0"/>
+          </a:p>
+        </p:txBody>
+      </p:sp>
+      <p:sp>
+        <p:nvSpPr>
+          <p:cNvPr id="71" name="Text 69"/>
+          <p:cNvSpPr/>
+          <p:nvPr/>
+        </p:nvSpPr>
+        <p:spPr>
+          <a:xfrm>
+            <a:off x="6208776" y="5188324"/>
+            <a:ext cx="2592324" cy="365760"/>
+          </a:xfrm>
+          <a:prstGeom prst="rect">
+            <a:avLst/>
+          </a:prstGeom>
+          <a:noFill/>
+          <a:ln/>
+        </p:spPr>
+        <p:txBody>
+          <a:bodyPr wrap="square" lIns="0" tIns="0" rIns="0" bIns="0" rtlCol="0" anchor="t"/>
+          <a:lstStyle/>
+          <a:p>
+            <a:pPr indent="0" marL="0">
+              <a:lnSpc>
+                <a:spcPts val="1700"/>
+              </a:lnSpc>
+              <a:buNone/>
+            </a:pPr>
+            <a:r>
+              <a:rPr lang="en-US" sz="1400" b="1" dirty="0">
+                <a:solidFill>
+                  <a:srgbClr val="8A5A11"/>
+                </a:solidFill>
+                <a:latin typeface="Cambria" pitchFamily="34" charset="0"/>
+                <a:ea typeface="Cambria" pitchFamily="34" charset="-122"/>
+                <a:cs typeface="Cambria" pitchFamily="34" charset="-120"/>
+              </a:rPr>
+              <a:t>Real reward, her choice</a:t>
+            </a:r>
+            <a:endParaRPr lang="en-US" sz="1400" dirty="0"/>
+          </a:p>
+        </p:txBody>
+      </p:sp>
+      <p:sp>
+        <p:nvSpPr>
+          <p:cNvPr id="72" name="Shape 70"/>
+          <p:cNvSpPr/>
+          <p:nvPr/>
+        </p:nvSpPr>
+        <p:spPr>
+          <a:xfrm>
+            <a:off x="9630918" y="1901952"/>
+            <a:ext cx="1389888" cy="2865748"/>
+          </a:xfrm>
+          <a:prstGeom prst="roundRect">
+            <a:avLst>
+              <a:gd name="adj" fmla="val 9211"/>
+            </a:avLst>
+          </a:prstGeom>
+          <a:solidFill>
+            <a:srgbClr val="16233B"/>
+          </a:solidFill>
+          <a:ln w="12700">
+            <a:solidFill>
+              <a:srgbClr val="2E4571"/>
+            </a:solidFill>
+            <a:prstDash val="solid"/>
+          </a:ln>
+        </p:spPr>
+      </p:sp>
+      <p:sp>
+        <p:nvSpPr>
+          <p:cNvPr id="73" name="Shape 71"/>
+          <p:cNvSpPr/>
+          <p:nvPr/>
+        </p:nvSpPr>
+        <p:spPr>
+          <a:xfrm>
+            <a:off x="9681210" y="1952244"/>
+            <a:ext cx="1289304" cy="2765164"/>
+          </a:xfrm>
+          <a:prstGeom prst="roundRect">
+            <a:avLst>
+              <a:gd name="adj" fmla="val 7092"/>
+            </a:avLst>
+          </a:prstGeom>
+          <a:solidFill>
+            <a:srgbClr val="FFFFFF"/>
+          </a:solidFill>
+          <a:ln w="12700">
+            <a:solidFill>
+              <a:srgbClr val="333333"/>
+            </a:solidFill>
+            <a:prstDash val="solid"/>
+          </a:ln>
+        </p:spPr>
+      </p:sp>
+      <p:sp>
+        <p:nvSpPr>
+          <p:cNvPr id="74" name="Shape 72"/>
+          <p:cNvSpPr/>
+          <p:nvPr/>
+        </p:nvSpPr>
+        <p:spPr>
+          <a:xfrm>
+            <a:off x="10124694" y="1963217"/>
+            <a:ext cx="402336" cy="68580"/>
+          </a:xfrm>
+          <a:prstGeom prst="roundRect">
+            <a:avLst>
+              <a:gd name="adj" fmla="val 49333"/>
+            </a:avLst>
+          </a:prstGeom>
+          <a:solidFill>
+            <a:srgbClr val="16233B"/>
+          </a:solidFill>
+          <a:ln w="12700">
+            <a:solidFill>
+              <a:srgbClr val="333333"/>
+            </a:solidFill>
+            <a:prstDash val="solid"/>
+          </a:ln>
+        </p:spPr>
+      </p:sp>
+      <p:sp>
+        <p:nvSpPr>
+          <p:cNvPr id="75" name="Shape 73"/>
+          <p:cNvSpPr/>
+          <p:nvPr/>
+        </p:nvSpPr>
+        <p:spPr>
+          <a:xfrm>
+            <a:off x="10106406" y="4644256"/>
+            <a:ext cx="438912" cy="25603"/>
+          </a:xfrm>
+          <a:prstGeom prst="roundRect">
+            <a:avLst>
+              <a:gd name="adj" fmla="val 50000"/>
+            </a:avLst>
+          </a:prstGeom>
+          <a:solidFill>
+            <a:srgbClr val="C6CFDD"/>
+          </a:solidFill>
+          <a:ln w="12700">
+            <a:solidFill>
+              <a:srgbClr val="333333"/>
+            </a:solidFill>
+            <a:prstDash val="solid"/>
+          </a:ln>
+        </p:spPr>
+      </p:sp>
+      <p:sp>
+        <p:nvSpPr>
+          <p:cNvPr id="76" name="Text 74"/>
+          <p:cNvSpPr/>
+          <p:nvPr/>
+        </p:nvSpPr>
+        <p:spPr>
+          <a:xfrm>
+            <a:off x="9772650" y="1965960"/>
+            <a:ext cx="1106424" cy="146304"/>
+          </a:xfrm>
+          <a:prstGeom prst="rect">
+            <a:avLst/>
+          </a:prstGeom>
+          <a:noFill/>
+          <a:ln/>
+        </p:spPr>
+        <p:txBody>
+          <a:bodyPr wrap="square" lIns="0" tIns="0" rIns="0" bIns="0" rtlCol="0" anchor="ctr"/>
+          <a:lstStyle/>
+          <a:p>
+            <a:pPr indent="0" marL="0">
+              <a:buNone/>
+            </a:pPr>
+            <a:r>
+              <a:rPr lang="en-US" sz="600" b="1" dirty="0">
+                <a:solidFill>
+                  <a:srgbClr val="1B2338"/>
+                </a:solidFill>
+                <a:latin typeface="Calibri" pitchFamily="34" charset="0"/>
+                <a:ea typeface="Calibri" pitchFamily="34" charset="-122"/>
+                <a:cs typeface="Calibri" pitchFamily="34" charset="-120"/>
+              </a:rPr>
+              <a:t>07:30</a:t>
+            </a:r>
+            <a:endParaRPr lang="en-US" sz="600" dirty="0"/>
+          </a:p>
+        </p:txBody>
+      </p:sp>
+      <p:sp>
+        <p:nvSpPr>
+          <p:cNvPr id="77" name="Text 75"/>
+          <p:cNvSpPr/>
+          <p:nvPr/>
+        </p:nvSpPr>
+        <p:spPr>
+          <a:xfrm>
+            <a:off x="9772650" y="1965960"/>
+            <a:ext cx="1106424" cy="146304"/>
+          </a:xfrm>
+          <a:prstGeom prst="rect">
+            <a:avLst/>
+          </a:prstGeom>
+          <a:noFill/>
+          <a:ln/>
+        </p:spPr>
+        <p:txBody>
+          <a:bodyPr wrap="square" lIns="0" tIns="0" rIns="0" bIns="0" rtlCol="0" anchor="ctr"/>
+          <a:lstStyle/>
+          <a:p>
+            <a:pPr algn="r" indent="0" marL="0">
+              <a:buNone/>
+            </a:pPr>
+            <a:r>
+              <a:rPr lang="en-US" sz="500" dirty="0">
+                <a:solidFill>
+                  <a:srgbClr val="5E6980"/>
+                </a:solidFill>
+                <a:latin typeface="Calibri" pitchFamily="34" charset="0"/>
+                <a:ea typeface="Calibri" pitchFamily="34" charset="-122"/>
+                <a:cs typeface="Calibri" pitchFamily="34" charset="-120"/>
+              </a:rPr>
+              <a:t>▮▮▮</a:t>
+            </a:r>
+            <a:endParaRPr lang="en-US" sz="500" dirty="0"/>
+          </a:p>
+        </p:txBody>
+      </p:sp>
+      <p:sp>
+        <p:nvSpPr>
+          <p:cNvPr id="78" name="Shape 76"/>
+          <p:cNvSpPr/>
+          <p:nvPr/>
+        </p:nvSpPr>
+        <p:spPr>
+          <a:xfrm>
+            <a:off x="9681210" y="2135124"/>
+            <a:ext cx="1289304" cy="219456"/>
+          </a:xfrm>
+          <a:prstGeom prst="rect">
+            <a:avLst/>
+          </a:prstGeom>
+          <a:solidFill>
+            <a:srgbClr val="44795A"/>
+          </a:solidFill>
+          <a:ln w="12700">
+            <a:solidFill>
+              <a:srgbClr val="333333"/>
+            </a:solidFill>
+            <a:prstDash val="solid"/>
+          </a:ln>
+        </p:spPr>
+      </p:sp>
+      <p:sp>
+        <p:nvSpPr>
+          <p:cNvPr id="79" name="Text 77"/>
+          <p:cNvSpPr/>
+          <p:nvPr/>
+        </p:nvSpPr>
+        <p:spPr>
+          <a:xfrm>
+            <a:off x="9772650" y="2135124"/>
+            <a:ext cx="1106424" cy="219456"/>
+          </a:xfrm>
+          <a:prstGeom prst="rect">
+            <a:avLst/>
+          </a:prstGeom>
+          <a:noFill/>
+          <a:ln/>
+        </p:spPr>
+        <p:txBody>
+          <a:bodyPr wrap="square" lIns="0" tIns="0" rIns="0" bIns="0" rtlCol="0" anchor="ctr"/>
+          <a:lstStyle/>
+          <a:p>
+            <a:pPr indent="0" marL="0">
+              <a:buNone/>
+            </a:pPr>
+            <a:r>
+              <a:rPr lang="en-US" sz="650" b="1" dirty="0">
+                <a:solidFill>
+                  <a:srgbClr val="FFFFFF"/>
+                </a:solidFill>
+                <a:latin typeface="Calibri" pitchFamily="34" charset="0"/>
+                <a:ea typeface="Calibri" pitchFamily="34" charset="-122"/>
+                <a:cs typeface="Calibri" pitchFamily="34" charset="-120"/>
+              </a:rPr>
+              <a:t>Your road</a:t>
+            </a:r>
+            <a:endParaRPr lang="en-US" sz="650" dirty="0"/>
+          </a:p>
+        </p:txBody>
+      </p:sp>
+      <p:sp>
+        <p:nvSpPr>
+          <p:cNvPr id="80" name="Shape 78"/>
+          <p:cNvSpPr/>
+          <p:nvPr/>
+        </p:nvSpPr>
+        <p:spPr>
+          <a:xfrm>
+            <a:off x="9850374" y="2592324"/>
+            <a:ext cx="20117" cy="384048"/>
+          </a:xfrm>
+          <a:prstGeom prst="rect">
+            <a:avLst/>
+          </a:prstGeom>
+          <a:solidFill>
+            <a:srgbClr val="E2EAF4"/>
+          </a:solidFill>
+          <a:ln w="12700">
+            <a:solidFill>
+              <a:srgbClr val="333333"/>
+            </a:solidFill>
+            <a:prstDash val="solid"/>
+          </a:ln>
+        </p:spPr>
+      </p:sp>
+      <p:sp>
+        <p:nvSpPr>
+          <p:cNvPr id="81" name="Shape 79"/>
+          <p:cNvSpPr/>
+          <p:nvPr/>
+        </p:nvSpPr>
+        <p:spPr>
+          <a:xfrm>
+            <a:off x="9818370" y="2464308"/>
+            <a:ext cx="118872" cy="118872"/>
+          </a:xfrm>
+          <a:prstGeom prst="ellipse">
+            <a:avLst/>
           </a:prstGeom>
           <a:solidFill>
             <a:srgbClr val="44795A"/>
@@ -37447,14 +39313,14 @@
       </p:sp>
       <p:sp>
         <p:nvSpPr>
-          <p:cNvPr id="25" name="Text 23"/>
-          <p:cNvSpPr/>
-          <p:nvPr/>
-        </p:nvSpPr>
-        <p:spPr>
-          <a:xfrm>
-            <a:off x="9194292" y="2103120"/>
-            <a:ext cx="1298448" cy="274320"/>
+          <p:cNvPr id="82" name="Text 80"/>
+          <p:cNvSpPr/>
+          <p:nvPr/>
+        </p:nvSpPr>
+        <p:spPr>
+          <a:xfrm>
+            <a:off x="9982962" y="2441448"/>
+            <a:ext cx="905256" cy="146304"/>
           </a:xfrm>
           <a:prstGeom prst="rect">
             <a:avLst/>
@@ -37466,50 +39332,53 @@
           <a:bodyPr wrap="square" lIns="0" tIns="0" rIns="0" bIns="0" rtlCol="0" anchor="ctr"/>
           <a:lstStyle/>
           <a:p>
-            <a:pPr algn="ctr" indent="0" marL="0">
-              <a:buNone/>
-            </a:pPr>
-            <a:r>
-              <a:rPr lang="en-US" sz="950" b="1" dirty="0">
-                <a:solidFill>
-                  <a:srgbClr val="FFFFFF"/>
+            <a:pPr indent="0" marL="0">
+              <a:buNone/>
+            </a:pPr>
+            <a:r>
+              <a:rPr lang="en-US" sz="650" b="1" dirty="0">
+                <a:solidFill>
+                  <a:srgbClr val="2E5540"/>
                 </a:solidFill>
                 <a:latin typeface="Calibri" pitchFamily="34" charset="0"/>
                 <a:ea typeface="Calibri" pitchFamily="34" charset="-122"/>
                 <a:cs typeface="Calibri" pitchFamily="34" charset="-120"/>
               </a:rPr>
-              <a:t>Growth path</a:t>
-            </a:r>
-            <a:endParaRPr lang="en-US" sz="950" dirty="0"/>
-          </a:p>
-        </p:txBody>
-      </p:sp>
-      <p:sp>
-        <p:nvSpPr>
-          <p:cNvPr id="26" name="Text 24"/>
-          <p:cNvSpPr/>
-          <p:nvPr/>
-        </p:nvSpPr>
-        <p:spPr>
-          <a:xfrm>
-            <a:off x="9194292" y="2487168"/>
-            <a:ext cx="2263140" cy="256032"/>
-          </a:xfrm>
-          <a:prstGeom prst="rect">
-            <a:avLst/>
-          </a:prstGeom>
-          <a:noFill/>
-          <a:ln/>
-        </p:spPr>
-        <p:txBody>
-          <a:bodyPr wrap="square" lIns="0" tIns="0" rIns="0" bIns="0" rtlCol="0" anchor="ctr"/>
+              <a:t>Day 30</a:t>
+            </a:r>
+            <a:endParaRPr lang="en-US" sz="650" dirty="0"/>
+          </a:p>
+        </p:txBody>
+      </p:sp>
+      <p:sp>
+        <p:nvSpPr>
+          <p:cNvPr id="83" name="Text 81"/>
+          <p:cNvSpPr/>
+          <p:nvPr/>
+        </p:nvSpPr>
+        <p:spPr>
+          <a:xfrm>
+            <a:off x="9982962" y="2592324"/>
+            <a:ext cx="905256" cy="201168"/>
+          </a:xfrm>
+          <a:prstGeom prst="rect">
+            <a:avLst/>
+          </a:prstGeom>
+          <a:noFill/>
+          <a:ln/>
+        </p:spPr>
+        <p:txBody>
+          <a:bodyPr wrap="square" lIns="0" tIns="0" rIns="0" bIns="0" rtlCol="0" anchor="t"/>
           <a:lstStyle/>
           <a:p>
             <a:pPr indent="0" marL="0">
-              <a:buNone/>
-            </a:pPr>
-            <a:r>
-              <a:rPr lang="en-US" sz="1050" b="1" dirty="0">
+              <a:lnSpc>
+                <a:spcPts val="700"/>
+              </a:lnSpc>
+              <a:buNone/>
+            </a:pPr>
+            <a:r>
+              <a:rPr lang="en-US" sz="550" dirty="0">
                 <a:solidFill>
                   <a:srgbClr val="5E6980"/>
                 </a:solidFill>
@@ -37517,22 +39386,111 @@
                 <a:ea typeface="Calibri" pitchFamily="34" charset="-122"/>
                 <a:cs typeface="Calibri" pitchFamily="34" charset="-120"/>
               </a:rPr>
-              <a:t>Day 30</a:t>
-            </a:r>
-            <a:endParaRPr lang="en-US" sz="1050" dirty="0"/>
-          </a:p>
-        </p:txBody>
-      </p:sp>
-      <p:sp>
-        <p:nvSpPr>
-          <p:cNvPr id="27" name="Text 25"/>
-          <p:cNvSpPr/>
-          <p:nvPr/>
-        </p:nvSpPr>
-        <p:spPr>
-          <a:xfrm>
-            <a:off x="9194292" y="2761488"/>
-            <a:ext cx="2263140" cy="603504"/>
+              <a:t>Check-in tomorrow</a:t>
+            </a:r>
+            <a:endParaRPr lang="en-US" sz="550" dirty="0"/>
+          </a:p>
+        </p:txBody>
+      </p:sp>
+      <p:sp>
+        <p:nvSpPr>
+          <p:cNvPr id="84" name="Shape 82"/>
+          <p:cNvSpPr/>
+          <p:nvPr/>
+        </p:nvSpPr>
+        <p:spPr>
+          <a:xfrm>
+            <a:off x="9850374" y="3049524"/>
+            <a:ext cx="20117" cy="384048"/>
+          </a:xfrm>
+          <a:prstGeom prst="rect">
+            <a:avLst/>
+          </a:prstGeom>
+          <a:solidFill>
+            <a:srgbClr val="E2EAF4"/>
+          </a:solidFill>
+          <a:ln w="12700">
+            <a:solidFill>
+              <a:srgbClr val="333333"/>
+            </a:solidFill>
+            <a:prstDash val="solid"/>
+          </a:ln>
+        </p:spPr>
+      </p:sp>
+      <p:sp>
+        <p:nvSpPr>
+          <p:cNvPr id="85" name="Shape 83"/>
+          <p:cNvSpPr/>
+          <p:nvPr/>
+        </p:nvSpPr>
+        <p:spPr>
+          <a:xfrm>
+            <a:off x="9818370" y="2921508"/>
+            <a:ext cx="118872" cy="118872"/>
+          </a:xfrm>
+          <a:prstGeom prst="ellipse">
+            <a:avLst/>
+          </a:prstGeom>
+          <a:solidFill>
+            <a:srgbClr val="FFFFFF"/>
+          </a:solidFill>
+          <a:ln w="12700">
+            <a:solidFill>
+              <a:srgbClr val="C6CFDD"/>
+            </a:solidFill>
+            <a:prstDash val="solid"/>
+          </a:ln>
+        </p:spPr>
+      </p:sp>
+      <p:sp>
+        <p:nvSpPr>
+          <p:cNvPr id="86" name="Text 84"/>
+          <p:cNvSpPr/>
+          <p:nvPr/>
+        </p:nvSpPr>
+        <p:spPr>
+          <a:xfrm>
+            <a:off x="9982962" y="2898648"/>
+            <a:ext cx="905256" cy="146304"/>
+          </a:xfrm>
+          <a:prstGeom prst="rect">
+            <a:avLst/>
+          </a:prstGeom>
+          <a:noFill/>
+          <a:ln/>
+        </p:spPr>
+        <p:txBody>
+          <a:bodyPr wrap="square" lIns="0" tIns="0" rIns="0" bIns="0" rtlCol="0" anchor="ctr"/>
+          <a:lstStyle/>
+          <a:p>
+            <a:pPr indent="0" marL="0">
+              <a:buNone/>
+            </a:pPr>
+            <a:r>
+              <a:rPr lang="en-US" sz="650" b="1" dirty="0">
+                <a:solidFill>
+                  <a:srgbClr val="1B2338"/>
+                </a:solidFill>
+                <a:latin typeface="Calibri" pitchFamily="34" charset="0"/>
+                <a:ea typeface="Calibri" pitchFamily="34" charset="-122"/>
+                <a:cs typeface="Calibri" pitchFamily="34" charset="-120"/>
+              </a:rPr>
+              <a:t>Day 60</a:t>
+            </a:r>
+            <a:endParaRPr lang="en-US" sz="650" dirty="0"/>
+          </a:p>
+        </p:txBody>
+      </p:sp>
+      <p:sp>
+        <p:nvSpPr>
+          <p:cNvPr id="87" name="Text 85"/>
+          <p:cNvSpPr/>
+          <p:nvPr/>
+        </p:nvSpPr>
+        <p:spPr>
+          <a:xfrm>
+            <a:off x="9982962" y="3049524"/>
+            <a:ext cx="905256" cy="201168"/>
           </a:xfrm>
           <a:prstGeom prst="rect">
             <a:avLst/>
@@ -37546,12 +39504,334 @@
           <a:p>
             <a:pPr indent="0" marL="0">
               <a:lnSpc>
-                <a:spcPts val="1900"/>
+                <a:spcPts val="700"/>
               </a:lnSpc>
               <a:buNone/>
             </a:pPr>
             <a:r>
-              <a:rPr lang="en-US" sz="1550" b="1" dirty="0">
+              <a:rPr lang="en-US" sz="550" dirty="0">
+                <a:solidFill>
+                  <a:srgbClr val="5E6980"/>
+                </a:solidFill>
+                <a:latin typeface="Calibri" pitchFamily="34" charset="0"/>
+                <a:ea typeface="Calibri" pitchFamily="34" charset="-122"/>
+                <a:cs typeface="Calibri" pitchFamily="34" charset="-120"/>
+              </a:rPr>
+              <a:t>Cross-training choice</a:t>
+            </a:r>
+            <a:endParaRPr lang="en-US" sz="550" dirty="0"/>
+          </a:p>
+        </p:txBody>
+      </p:sp>
+      <p:sp>
+        <p:nvSpPr>
+          <p:cNvPr id="88" name="Shape 86"/>
+          <p:cNvSpPr/>
+          <p:nvPr/>
+        </p:nvSpPr>
+        <p:spPr>
+          <a:xfrm>
+            <a:off x="9818370" y="3378708"/>
+            <a:ext cx="118872" cy="118872"/>
+          </a:xfrm>
+          <a:prstGeom prst="ellipse">
+            <a:avLst/>
+          </a:prstGeom>
+          <a:solidFill>
+            <a:srgbClr val="FFFFFF"/>
+          </a:solidFill>
+          <a:ln w="12700">
+            <a:solidFill>
+              <a:srgbClr val="C6CFDD"/>
+            </a:solidFill>
+            <a:prstDash val="solid"/>
+          </a:ln>
+        </p:spPr>
+      </p:sp>
+      <p:sp>
+        <p:nvSpPr>
+          <p:cNvPr id="89" name="Text 87"/>
+          <p:cNvSpPr/>
+          <p:nvPr/>
+        </p:nvSpPr>
+        <p:spPr>
+          <a:xfrm>
+            <a:off x="9982962" y="3355848"/>
+            <a:ext cx="905256" cy="146304"/>
+          </a:xfrm>
+          <a:prstGeom prst="rect">
+            <a:avLst/>
+          </a:prstGeom>
+          <a:noFill/>
+          <a:ln/>
+        </p:spPr>
+        <p:txBody>
+          <a:bodyPr wrap="square" lIns="0" tIns="0" rIns="0" bIns="0" rtlCol="0" anchor="ctr"/>
+          <a:lstStyle/>
+          <a:p>
+            <a:pPr indent="0" marL="0">
+              <a:buNone/>
+            </a:pPr>
+            <a:r>
+              <a:rPr lang="en-US" sz="650" b="1" dirty="0">
+                <a:solidFill>
+                  <a:srgbClr val="1B2338"/>
+                </a:solidFill>
+                <a:latin typeface="Calibri" pitchFamily="34" charset="0"/>
+                <a:ea typeface="Calibri" pitchFamily="34" charset="-122"/>
+                <a:cs typeface="Calibri" pitchFamily="34" charset="-120"/>
+              </a:rPr>
+              <a:t>Day 90</a:t>
+            </a:r>
+            <a:endParaRPr lang="en-US" sz="650" dirty="0"/>
+          </a:p>
+        </p:txBody>
+      </p:sp>
+      <p:sp>
+        <p:nvSpPr>
+          <p:cNvPr id="90" name="Text 88"/>
+          <p:cNvSpPr/>
+          <p:nvPr/>
+        </p:nvSpPr>
+        <p:spPr>
+          <a:xfrm>
+            <a:off x="9982962" y="3506724"/>
+            <a:ext cx="905256" cy="201168"/>
+          </a:xfrm>
+          <a:prstGeom prst="rect">
+            <a:avLst/>
+          </a:prstGeom>
+          <a:noFill/>
+          <a:ln/>
+        </p:spPr>
+        <p:txBody>
+          <a:bodyPr wrap="square" lIns="0" tIns="0" rIns="0" bIns="0" rtlCol="0" anchor="t"/>
+          <a:lstStyle/>
+          <a:p>
+            <a:pPr indent="0" marL="0">
+              <a:lnSpc>
+                <a:spcPts val="700"/>
+              </a:lnSpc>
+              <a:buNone/>
+            </a:pPr>
+            <a:r>
+              <a:rPr lang="en-US" sz="550" dirty="0">
+                <a:solidFill>
+                  <a:srgbClr val="5E6980"/>
+                </a:solidFill>
+                <a:latin typeface="Calibri" pitchFamily="34" charset="0"/>
+                <a:ea typeface="Calibri" pitchFamily="34" charset="-122"/>
+                <a:cs typeface="Calibri" pitchFamily="34" charset="-120"/>
+              </a:rPr>
+              <a:t>Milestone and path picker</a:t>
+            </a:r>
+            <a:endParaRPr lang="en-US" sz="550" dirty="0"/>
+          </a:p>
+        </p:txBody>
+      </p:sp>
+      <p:sp>
+        <p:nvSpPr>
+          <p:cNvPr id="91" name="Shape 89"/>
+          <p:cNvSpPr/>
+          <p:nvPr/>
+        </p:nvSpPr>
+        <p:spPr>
+          <a:xfrm>
+            <a:off x="9763506" y="4150480"/>
+            <a:ext cx="1124712" cy="420624"/>
+          </a:xfrm>
+          <a:prstGeom prst="roundRect">
+            <a:avLst>
+              <a:gd name="adj" fmla="val 13043"/>
+            </a:avLst>
+          </a:prstGeom>
+          <a:solidFill>
+            <a:srgbClr val="DDEAE1"/>
+          </a:solidFill>
+          <a:ln w="12700">
+            <a:solidFill>
+              <a:srgbClr val="333333"/>
+            </a:solidFill>
+            <a:prstDash val="solid"/>
+          </a:ln>
+        </p:spPr>
+      </p:sp>
+      <p:sp>
+        <p:nvSpPr>
+          <p:cNvPr id="92" name="Text 90"/>
+          <p:cNvSpPr/>
+          <p:nvPr/>
+        </p:nvSpPr>
+        <p:spPr>
+          <a:xfrm>
+            <a:off x="9827514" y="4177912"/>
+            <a:ext cx="996696" cy="365760"/>
+          </a:xfrm>
+          <a:prstGeom prst="rect">
+            <a:avLst/>
+          </a:prstGeom>
+          <a:noFill/>
+          <a:ln/>
+        </p:spPr>
+        <p:txBody>
+          <a:bodyPr wrap="square" lIns="0" tIns="0" rIns="0" bIns="0" rtlCol="0" anchor="t"/>
+          <a:lstStyle/>
+          <a:p>
+            <a:pPr indent="0" marL="0">
+              <a:lnSpc>
+                <a:spcPts val="700"/>
+              </a:lnSpc>
+              <a:buNone/>
+            </a:pPr>
+            <a:r>
+              <a:rPr lang="en-US" sz="550" dirty="0">
+                <a:solidFill>
+                  <a:srgbClr val="2E5540"/>
+                </a:solidFill>
+                <a:latin typeface="Calibri" pitchFamily="34" charset="0"/>
+                <a:ea typeface="Calibri" pitchFamily="34" charset="-122"/>
+                <a:cs typeface="Calibri" pitchFamily="34" charset="-120"/>
+              </a:rPr>
+              <a:t>Two recovery days a week are held for you. Skipping a training costs you nothing.</a:t>
+            </a:r>
+            <a:endParaRPr lang="en-US" sz="550" dirty="0"/>
+          </a:p>
+        </p:txBody>
+      </p:sp>
+      <p:sp>
+        <p:nvSpPr>
+          <p:cNvPr id="93" name="Shape 91"/>
+          <p:cNvSpPr/>
+          <p:nvPr/>
+        </p:nvSpPr>
+        <p:spPr>
+          <a:xfrm>
+            <a:off x="9029700" y="4895716"/>
+            <a:ext cx="1298448" cy="256032"/>
+          </a:xfrm>
+          <a:prstGeom prst="roundRect">
+            <a:avLst>
+              <a:gd name="adj" fmla="val 50000"/>
+            </a:avLst>
+          </a:prstGeom>
+          <a:solidFill>
+            <a:srgbClr val="44795A"/>
+          </a:solidFill>
+          <a:ln w="12700">
+            <a:solidFill>
+              <a:srgbClr val="333333"/>
+            </a:solidFill>
+            <a:prstDash val="solid"/>
+          </a:ln>
+        </p:spPr>
+      </p:sp>
+      <p:sp>
+        <p:nvSpPr>
+          <p:cNvPr id="94" name="Text 92"/>
+          <p:cNvSpPr/>
+          <p:nvPr/>
+        </p:nvSpPr>
+        <p:spPr>
+          <a:xfrm>
+            <a:off x="9029700" y="4895716"/>
+            <a:ext cx="1298448" cy="256032"/>
+          </a:xfrm>
+          <a:prstGeom prst="rect">
+            <a:avLst/>
+          </a:prstGeom>
+          <a:noFill/>
+          <a:ln/>
+        </p:spPr>
+        <p:txBody>
+          <a:bodyPr wrap="square" lIns="0" tIns="0" rIns="0" bIns="0" rtlCol="0" anchor="ctr"/>
+          <a:lstStyle/>
+          <a:p>
+            <a:pPr algn="ctr" indent="0" marL="0">
+              <a:buNone/>
+            </a:pPr>
+            <a:r>
+              <a:rPr lang="en-US" sz="900" b="1" dirty="0">
+                <a:solidFill>
+                  <a:srgbClr val="FFFFFF"/>
+                </a:solidFill>
+                <a:latin typeface="Calibri" pitchFamily="34" charset="0"/>
+                <a:ea typeface="Calibri" pitchFamily="34" charset="-122"/>
+                <a:cs typeface="Calibri" pitchFamily="34" charset="-120"/>
+              </a:rPr>
+              <a:t>Growth path</a:t>
+            </a:r>
+            <a:endParaRPr lang="en-US" sz="900" dirty="0"/>
+          </a:p>
+        </p:txBody>
+      </p:sp>
+      <p:sp>
+        <p:nvSpPr>
+          <p:cNvPr id="95" name="Text 93"/>
+          <p:cNvSpPr/>
+          <p:nvPr/>
+        </p:nvSpPr>
+        <p:spPr>
+          <a:xfrm>
+            <a:off x="10401300" y="4895716"/>
+            <a:ext cx="1220724" cy="256032"/>
+          </a:xfrm>
+          <a:prstGeom prst="rect">
+            <a:avLst/>
+          </a:prstGeom>
+          <a:noFill/>
+          <a:ln/>
+        </p:spPr>
+        <p:txBody>
+          <a:bodyPr wrap="square" lIns="0" tIns="0" rIns="0" bIns="0" rtlCol="0" anchor="ctr"/>
+          <a:lstStyle/>
+          <a:p>
+            <a:pPr indent="0" marL="0">
+              <a:buNone/>
+            </a:pPr>
+            <a:r>
+              <a:rPr lang="en-US" sz="900" b="1" dirty="0">
+                <a:solidFill>
+                  <a:srgbClr val="5E6980"/>
+                </a:solidFill>
+                <a:latin typeface="Calibri" pitchFamily="34" charset="0"/>
+                <a:ea typeface="Calibri" pitchFamily="34" charset="-122"/>
+                <a:cs typeface="Calibri" pitchFamily="34" charset="-120"/>
+              </a:rPr>
+              <a:t>Day 30</a:t>
+            </a:r>
+            <a:endParaRPr lang="en-US" sz="900" dirty="0"/>
+          </a:p>
+        </p:txBody>
+      </p:sp>
+      <p:sp>
+        <p:nvSpPr>
+          <p:cNvPr id="96" name="Text 94"/>
+          <p:cNvSpPr/>
+          <p:nvPr/>
+        </p:nvSpPr>
+        <p:spPr>
+          <a:xfrm>
+            <a:off x="9029700" y="5188324"/>
+            <a:ext cx="2592324" cy="365760"/>
+          </a:xfrm>
+          <a:prstGeom prst="rect">
+            <a:avLst/>
+          </a:prstGeom>
+          <a:noFill/>
+          <a:ln/>
+        </p:spPr>
+        <p:txBody>
+          <a:bodyPr wrap="square" lIns="0" tIns="0" rIns="0" bIns="0" rtlCol="0" anchor="t"/>
+          <a:lstStyle/>
+          <a:p>
+            <a:pPr indent="0" marL="0">
+              <a:lnSpc>
+                <a:spcPts val="1700"/>
+              </a:lnSpc>
+              <a:buNone/>
+            </a:pPr>
+            <a:r>
+              <a:rPr lang="en-US" sz="1400" b="1" dirty="0">
                 <a:solidFill>
                   <a:srgbClr val="2E5540"/>
                 </a:solidFill>
@@ -37561,125 +39841,44 @@
               </a:rPr>
               <a:t>A visible road</a:t>
             </a:r>
-            <a:endParaRPr lang="en-US" sz="1550" dirty="0"/>
-          </a:p>
-        </p:txBody>
-      </p:sp>
-      <p:sp>
-        <p:nvSpPr>
-          <p:cNvPr id="28" name="Text 26"/>
-          <p:cNvSpPr/>
-          <p:nvPr/>
-        </p:nvSpPr>
-        <p:spPr>
-          <a:xfrm>
-            <a:off x="9194292" y="3401568"/>
-            <a:ext cx="2263140" cy="1280160"/>
-          </a:xfrm>
-          <a:prstGeom prst="rect">
-            <a:avLst/>
-          </a:prstGeom>
-          <a:noFill/>
-          <a:ln/>
-        </p:spPr>
-        <p:txBody>
-          <a:bodyPr wrap="square" lIns="0" tIns="0" rIns="0" bIns="0" rtlCol="0" anchor="t"/>
+            <a:endParaRPr lang="en-US" sz="1400" dirty="0"/>
+          </a:p>
+        </p:txBody>
+      </p:sp>
+      <p:sp>
+        <p:nvSpPr>
+          <p:cNvPr id="97" name="Text 95"/>
+          <p:cNvSpPr/>
+          <p:nvPr/>
+        </p:nvSpPr>
+        <p:spPr>
+          <a:xfrm>
+            <a:off x="566928" y="6236208"/>
+            <a:ext cx="10415016" cy="365760"/>
+          </a:xfrm>
+          <a:prstGeom prst="rect">
+            <a:avLst/>
+          </a:prstGeom>
+          <a:noFill/>
+          <a:ln/>
+        </p:spPr>
+        <p:txBody>
+          <a:bodyPr wrap="square" lIns="0" tIns="0" rIns="0" bIns="0" rtlCol="0" anchor="ctr"/>
           <a:lstStyle/>
           <a:p>
             <a:pPr indent="0" marL="0">
-              <a:lnSpc>
-                <a:spcPts val="1600"/>
-              </a:lnSpc>
-              <a:buNone/>
-            </a:pPr>
-            <a:r>
-              <a:rPr lang="en-US" sz="1200" dirty="0">
-                <a:solidFill>
-                  <a:srgbClr val="1B2338"/>
+              <a:buNone/>
+            </a:pPr>
+            <a:r>
+              <a:rPr lang="en-US" sz="1050" i="1" dirty="0">
+                <a:solidFill>
+                  <a:srgbClr val="5E6980"/>
                 </a:solidFill>
                 <a:latin typeface="Calibri" pitchFamily="34" charset="0"/>
                 <a:ea typeface="Calibri" pitchFamily="34" charset="-122"/>
                 <a:cs typeface="Calibri" pitchFamily="34" charset="-120"/>
               </a:rPr>
-              <a:t>Day-30 check-in tomorrow. Day 60 cross-training choice. Day 90 milestone and path picker. Two recovery days a week held.</a:t>
-            </a:r>
-            <a:endParaRPr lang="en-US" sz="1200" dirty="0"/>
-          </a:p>
-        </p:txBody>
-      </p:sp>
-      <p:sp>
-        <p:nvSpPr>
-          <p:cNvPr id="29" name="Text 27"/>
-          <p:cNvSpPr/>
-          <p:nvPr/>
-        </p:nvSpPr>
-        <p:spPr>
-          <a:xfrm>
-            <a:off x="566928" y="5138928"/>
-            <a:ext cx="11055096" cy="457200"/>
-          </a:xfrm>
-          <a:prstGeom prst="rect">
-            <a:avLst/>
-          </a:prstGeom>
-          <a:noFill/>
-          <a:ln/>
-        </p:spPr>
-        <p:txBody>
-          <a:bodyPr wrap="square" lIns="0" tIns="0" rIns="0" bIns="0" rtlCol="0" anchor="ctr"/>
-          <a:lstStyle/>
-          <a:p>
-            <a:pPr indent="0" marL="0">
-              <a:buNone/>
-            </a:pPr>
-            <a:r>
-              <a:rPr lang="en-US" sz="1300" dirty="0">
-                <a:solidFill>
-                  <a:srgbClr val="1B2338"/>
-                </a:solidFill>
-                <a:latin typeface="Calibri" pitchFamily="34" charset="0"/>
-                <a:ea typeface="Calibri" pitchFamily="34" charset="-122"/>
-                <a:cs typeface="Calibri" pitchFamily="34" charset="-120"/>
-              </a:rPr>
-              <a:t>Four surfaces, one associate. Every plan in this deck is drawn the same way, so the room compares experiences and not adjectives.</a:t>
-            </a:r>
-            <a:endParaRPr lang="en-US" sz="1300" dirty="0"/>
-          </a:p>
-        </p:txBody>
-      </p:sp>
-      <p:sp>
-        <p:nvSpPr>
-          <p:cNvPr id="30" name="Text 28"/>
-          <p:cNvSpPr/>
-          <p:nvPr/>
-        </p:nvSpPr>
-        <p:spPr>
-          <a:xfrm>
-            <a:off x="566928" y="6236208"/>
-            <a:ext cx="10415016" cy="365760"/>
-          </a:xfrm>
-          <a:prstGeom prst="rect">
-            <a:avLst/>
-          </a:prstGeom>
-          <a:noFill/>
-          <a:ln/>
-        </p:spPr>
-        <p:txBody>
-          <a:bodyPr wrap="square" lIns="0" tIns="0" rIns="0" bIns="0" rtlCol="0" anchor="ctr"/>
-          <a:lstStyle/>
-          <a:p>
-            <a:pPr indent="0" marL="0">
-              <a:buNone/>
-            </a:pPr>
-            <a:r>
-              <a:rPr lang="en-US" sz="1050" i="1" dirty="0">
-                <a:solidFill>
-                  <a:srgbClr val="5E6980"/>
-                </a:solidFill>
-                <a:latin typeface="Calibri" pitchFamily="34" charset="0"/>
-                <a:ea typeface="Calibri" pitchFamily="34" charset="-122"/>
-                <a:cs typeface="Calibri" pitchFamily="34" charset="-120"/>
-              </a:rPr>
-              <a:t>Illustrative dialogue, drafted to show intent. Not shipped UX copy.</a:t>
+              <a:t>Illustrative mockups, drafted to show intent. Not shipped UX copy. Four surfaces, one associate, so the room compares experiences and not adjectives.</a:t>
             </a:r>
             <a:endParaRPr lang="en-US" sz="1050" dirty="0"/>
           </a:p>
@@ -37687,7 +39886,7 @@
       </p:sp>
       <p:sp>
         <p:nvSpPr>
-          <p:cNvPr id="31" name="Text 29"/>
+          <p:cNvPr id="98" name="Text 96"/>
           <p:cNvSpPr/>
           <p:nvPr/>
         </p:nvSpPr>
